--- a/python 课设_答辩 PPT/python_course_defense_20260615_171117.pptx
+++ b/python 课设_答辩 PPT/python_course_defense_20260615_171117.pptx
@@ -4132,7 +4132,9 @@
             <a:avLst/>
           </a:prstGeom>
           <a:solidFill>
-            <a:srgbClr val="FDFBF7"/>
+            <a:srgbClr val="FDFBF7">
+              <a:alpha val="7340"/>
+            </a:srgbClr>
           </a:solidFill>
           <a:ln>
             <a:noFill/>
@@ -4327,46 +4329,6 @@
       </p:sp>
       <p:sp>
         <p:nvSpPr>
-          <p:cNvPr id="7" name="TextBox 7"/>
-          <p:cNvSpPr txBox="1"/>
-          <p:nvPr/>
-        </p:nvSpPr>
-        <p:spPr>
-          <a:xfrm>
-            <a:off x="1026795" y="3917632"/>
-            <a:ext cx="7049786" cy="335280"/>
-          </a:xfrm>
-          <a:prstGeom prst="rect">
-            <a:avLst/>
-          </a:prstGeom>
-          <a:noFill/>
-          <a:ln>
-            <a:noFill/>
-          </a:ln>
-        </p:spPr>
-        <p:txBody>
-          <a:bodyPr wrap="none" lIns="0" tIns="0" rIns="0" bIns="0" anchor="t" anchorCtr="0">
-            <a:spAutoFit/>
-          </a:bodyPr>
-          <a:lstStyle/>
-          <a:p>
-            <a:pPr algn="l"/>
-            <a:r>
-              <a:rPr lang="zh-CN" sz="1650" dirty="0">
-                <a:solidFill>
-                  <a:srgbClr val="8C8578"/>
-                </a:solidFill>
-                <a:latin typeface="Arial"/>
-                <a:ea typeface="Microsoft YaHei"/>
-                <a:cs typeface="Arial"/>
-              </a:rPr>
-              <a:t>使用 Python 数据处理、PCA 降维与机器学习模型，估计自然光相对光谱</a:t>
-            </a:r>
-          </a:p>
-        </p:txBody>
-      </p:sp>
-      <p:sp>
-        <p:nvSpPr>
           <p:cNvPr id="8" name="Line 8"/>
           <p:cNvSpPr/>
           <p:nvPr/>
@@ -4408,6 +4370,42 @@
           </a:p>
         </p:txBody>
       </p:sp>
+      <p:pic>
+        <p:nvPicPr>
+          <p:cNvPr id="24" name="图形 23">
+            <a:extLst>
+              <a:ext uri="{FF2B5EF4-FFF2-40B4-BE49-F238E27FC236}">
+                <a16:creationId xmlns:a16="http://schemas.microsoft.com/office/drawing/2014/main" id="{300534C5-DAEA-9718-AA25-059E2203A412}"/>
+              </a:ext>
+            </a:extLst>
+          </p:cNvPr>
+          <p:cNvPicPr>
+            <a:picLocks noChangeAspect="1"/>
+          </p:cNvPicPr>
+          <p:nvPr/>
+        </p:nvPicPr>
+        <p:blipFill>
+          <a:blip>
+            <a:extLst>
+              <a:ext uri="{96DAC541-7B7A-43D3-8B79-37D633B846F1}">
+                <asvg:svgBlip xmlns:asvg="http://schemas.microsoft.com/office/drawing/2016/SVG/main" r:embed="rId3"/>
+              </a:ext>
+            </a:extLst>
+          </a:blip>
+          <a:stretch>
+            <a:fillRect/>
+          </a:stretch>
+        </p:blipFill>
+        <p:spPr>
+          <a:xfrm>
+            <a:off x="5985169" y="-157975"/>
+            <a:ext cx="5840450" cy="5840450"/>
+          </a:xfrm>
+          <a:prstGeom prst="rect">
+            <a:avLst/>
+          </a:prstGeom>
+        </p:spPr>
+      </p:pic>
       <p:sp>
         <p:nvSpPr>
           <p:cNvPr id="9" name="TextBox 9"/>
@@ -4991,18 +4989,58 @@
           </a:p>
         </p:txBody>
       </p:sp>
+      <p:sp>
+        <p:nvSpPr>
+          <p:cNvPr id="7" name="TextBox 7"/>
+          <p:cNvSpPr txBox="1"/>
+          <p:nvPr/>
+        </p:nvSpPr>
+        <p:spPr>
+          <a:xfrm>
+            <a:off x="1026795" y="3917632"/>
+            <a:ext cx="7049786" cy="335280"/>
+          </a:xfrm>
+          <a:prstGeom prst="rect">
+            <a:avLst/>
+          </a:prstGeom>
+          <a:noFill/>
+          <a:ln>
+            <a:noFill/>
+          </a:ln>
+        </p:spPr>
+        <p:txBody>
+          <a:bodyPr wrap="none" lIns="0" tIns="0" rIns="0" bIns="0" anchor="t" anchorCtr="0">
+            <a:spAutoFit/>
+          </a:bodyPr>
+          <a:lstStyle/>
+          <a:p>
+            <a:pPr algn="l"/>
+            <a:r>
+              <a:rPr lang="zh-CN" sz="1650" dirty="0">
+                <a:solidFill>
+                  <a:srgbClr val="8C8578"/>
+                </a:solidFill>
+                <a:latin typeface="Arial"/>
+                <a:ea typeface="Microsoft YaHei"/>
+                <a:cs typeface="Arial"/>
+              </a:rPr>
+              <a:t>使用 Python 数据处理、PCA 降维与机器学习模型，估计自然光相对光谱</a:t>
+            </a:r>
+          </a:p>
+        </p:txBody>
+      </p:sp>
     </p:spTree>
   </p:cSld>
   <p:clrMapOvr>
     <a:masterClrMapping/>
   </p:clrMapOvr>
-  <mc:AlternateContent xmlns:mc="http://schemas.openxmlformats.org/markup-compatibility/2006">
-    <mc:Choice xmlns:p14="http://schemas.microsoft.com/office/powerpoint/2010/main" Requires="p14">
+  <mc:AlternateContent xmlns:mc="http://schemas.openxmlformats.org/markup-compatibility/2006" xmlns:p14="http://schemas.microsoft.com/office/powerpoint/2010/main">
+    <mc:Choice Requires="p14">
       <p:transition p14:dur="400">
         <p:fade/>
       </p:transition>
     </mc:Choice>
-    <mc:Fallback>
+    <mc:Fallback xmlns:asvg="http://schemas.microsoft.com/office/drawing/2016/SVG/main" xmlns:a16="http://schemas.microsoft.com/office/drawing/2014/main" xmlns="">
       <p:transition>
         <p:fade/>
       </p:transition>
@@ -5060,6 +5098,128 @@
                                         <p:cTn id="7" dur="400"/>
                                         <p:tgtEl>
                                           <p:spTgt spid="19"/>
+                                        </p:tgtEl>
+                                      </p:cBhvr>
+                                    </p:animEffect>
+                                  </p:childTnLst>
+                                </p:cTn>
+                              </p:par>
+                            </p:childTnLst>
+                          </p:cTn>
+                        </p:par>
+                      </p:childTnLst>
+                    </p:cTn>
+                  </p:par>
+                  <p:par>
+                    <p:cTn id="8" fill="hold">
+                      <p:stCondLst>
+                        <p:cond delay="indefinite"/>
+                      </p:stCondLst>
+                      <p:childTnLst>
+                        <p:par>
+                          <p:cTn id="9" fill="hold">
+                            <p:stCondLst>
+                              <p:cond delay="0"/>
+                            </p:stCondLst>
+                            <p:childTnLst>
+                              <p:par>
+                                <p:cTn id="10" presetID="49" presetClass="entr" presetSubtype="0" decel="100000" fill="hold" nodeType="clickEffect">
+                                  <p:stCondLst>
+                                    <p:cond delay="0"/>
+                                  </p:stCondLst>
+                                  <p:childTnLst>
+                                    <p:set>
+                                      <p:cBhvr>
+                                        <p:cTn id="11" dur="1" fill="hold">
+                                          <p:stCondLst>
+                                            <p:cond delay="0"/>
+                                          </p:stCondLst>
+                                        </p:cTn>
+                                        <p:tgtEl>
+                                          <p:spTgt spid="24"/>
+                                        </p:tgtEl>
+                                        <p:attrNameLst>
+                                          <p:attrName>style.visibility</p:attrName>
+                                        </p:attrNameLst>
+                                      </p:cBhvr>
+                                      <p:to>
+                                        <p:strVal val="visible"/>
+                                      </p:to>
+                                    </p:set>
+                                    <p:anim calcmode="lin" valueType="num">
+                                      <p:cBhvr>
+                                        <p:cTn id="12" dur="1250" fill="hold"/>
+                                        <p:tgtEl>
+                                          <p:spTgt spid="24"/>
+                                        </p:tgtEl>
+                                        <p:attrNameLst>
+                                          <p:attrName>ppt_w</p:attrName>
+                                        </p:attrNameLst>
+                                      </p:cBhvr>
+                                      <p:tavLst>
+                                        <p:tav tm="0">
+                                          <p:val>
+                                            <p:fltVal val="0"/>
+                                          </p:val>
+                                        </p:tav>
+                                        <p:tav tm="100000">
+                                          <p:val>
+                                            <p:strVal val="#ppt_w"/>
+                                          </p:val>
+                                        </p:tav>
+                                      </p:tavLst>
+                                    </p:anim>
+                                    <p:anim calcmode="lin" valueType="num">
+                                      <p:cBhvr>
+                                        <p:cTn id="13" dur="1250" fill="hold"/>
+                                        <p:tgtEl>
+                                          <p:spTgt spid="24"/>
+                                        </p:tgtEl>
+                                        <p:attrNameLst>
+                                          <p:attrName>ppt_h</p:attrName>
+                                        </p:attrNameLst>
+                                      </p:cBhvr>
+                                      <p:tavLst>
+                                        <p:tav tm="0">
+                                          <p:val>
+                                            <p:fltVal val="0"/>
+                                          </p:val>
+                                        </p:tav>
+                                        <p:tav tm="100000">
+                                          <p:val>
+                                            <p:strVal val="#ppt_h"/>
+                                          </p:val>
+                                        </p:tav>
+                                      </p:tavLst>
+                                    </p:anim>
+                                    <p:anim calcmode="lin" valueType="num">
+                                      <p:cBhvr>
+                                        <p:cTn id="14" dur="1250" fill="hold"/>
+                                        <p:tgtEl>
+                                          <p:spTgt spid="24"/>
+                                        </p:tgtEl>
+                                        <p:attrNameLst>
+                                          <p:attrName>style.rotation</p:attrName>
+                                        </p:attrNameLst>
+                                      </p:cBhvr>
+                                      <p:tavLst>
+                                        <p:tav tm="0">
+                                          <p:val>
+                                            <p:fltVal val="360"/>
+                                          </p:val>
+                                        </p:tav>
+                                        <p:tav tm="100000">
+                                          <p:val>
+                                            <p:fltVal val="0"/>
+                                          </p:val>
+                                        </p:tav>
+                                      </p:tavLst>
+                                    </p:anim>
+                                    <p:animEffect transition="in" filter="fade">
+                                      <p:cBhvr>
+                                        <p:cTn id="15" dur="1250"/>
+                                        <p:tgtEl>
+                                          <p:spTgt spid="24"/>
                                         </p:tgtEl>
                                       </p:cBhvr>
                                     </p:animEffect>
@@ -5890,8 +6050,8 @@
           </p:nvSpPr>
           <p:spPr>
             <a:xfrm>
-              <a:off x="9690830" y="1806892"/>
-              <a:ext cx="430340" cy="274320"/>
+              <a:off x="9716845" y="1806892"/>
+              <a:ext cx="378310" cy="207749"/>
             </a:xfrm>
             <a:prstGeom prst="rect">
               <a:avLst/>
@@ -5917,7 +6077,29 @@
                   <a:ea typeface="Microsoft YaHei"/>
                   <a:cs typeface="Consolas"/>
                 </a:rPr>
-                <a:t>0.22</a:t>
+                <a:t>0.</a:t>
+              </a:r>
+              <a:r>
+                <a:rPr lang="en-US" altLang="zh-CN" sz="1350" dirty="0">
+                  <a:solidFill>
+                    <a:srgbClr val="2D2A26"/>
+                  </a:solidFill>
+                  <a:latin typeface="Consolas"/>
+                  <a:ea typeface="Microsoft YaHei"/>
+                  <a:cs typeface="Consolas"/>
+                </a:rPr>
+                <a:t>1</a:t>
+              </a:r>
+              <a:r>
+                <a:rPr lang="zh-CN" sz="1350" dirty="0">
+                  <a:solidFill>
+                    <a:srgbClr val="2D2A26"/>
+                  </a:solidFill>
+                  <a:latin typeface="Consolas"/>
+                  <a:ea typeface="Microsoft YaHei"/>
+                  <a:cs typeface="Consolas"/>
+                </a:rPr>
+                <a:t>2</a:t>
               </a:r>
             </a:p>
           </p:txBody>
@@ -6343,7 +6525,7 @@
             <a:bodyPr/>
             <a:lstStyle/>
             <a:p>
-              <a:endParaRPr lang="zh-CN" altLang="en-US"/>
+              <a:endParaRPr lang="zh-CN" altLang="en-US" dirty="0"/>
             </a:p>
           </p:txBody>
         </p:sp>
@@ -6435,8 +6617,8 @@
           </p:nvSpPr>
           <p:spPr>
             <a:xfrm>
-              <a:off x="9690830" y="2568892"/>
-              <a:ext cx="430340" cy="274320"/>
+              <a:off x="9716844" y="2568892"/>
+              <a:ext cx="378310" cy="207749"/>
             </a:xfrm>
             <a:prstGeom prst="rect">
               <a:avLst/>
@@ -6462,8 +6644,27 @@
                   <a:ea typeface="Microsoft YaHei"/>
                   <a:cs typeface="Consolas"/>
                 </a:rPr>
-                <a:t>0.01</a:t>
-              </a:r>
+                <a:t>0.</a:t>
+              </a:r>
+              <a:r>
+                <a:rPr lang="en-US" altLang="zh-CN" sz="1350" dirty="0">
+                  <a:solidFill>
+                    <a:srgbClr val="2D2A26"/>
+                  </a:solidFill>
+                  <a:latin typeface="Consolas"/>
+                  <a:ea typeface="Microsoft YaHei"/>
+                  <a:cs typeface="Consolas"/>
+                </a:rPr>
+                <a:t>22</a:t>
+              </a:r>
+              <a:endParaRPr lang="zh-CN" sz="1350" dirty="0">
+                <a:solidFill>
+                  <a:srgbClr val="2D2A26"/>
+                </a:solidFill>
+                <a:latin typeface="Consolas"/>
+                <a:ea typeface="Microsoft YaHei"/>
+                <a:cs typeface="Consolas"/>
+              </a:endParaRPr>
             </a:p>
           </p:txBody>
         </p:sp>
@@ -7198,13 +7399,13 @@
   <p:clrMapOvr>
     <a:masterClrMapping/>
   </p:clrMapOvr>
-  <mc:AlternateContent xmlns:mc="http://schemas.openxmlformats.org/markup-compatibility/2006">
-    <mc:Choice xmlns:p14="http://schemas.microsoft.com/office/powerpoint/2010/main" Requires="p14">
+  <mc:AlternateContent xmlns:mc="http://schemas.openxmlformats.org/markup-compatibility/2006" xmlns:p14="http://schemas.microsoft.com/office/powerpoint/2010/main">
+    <mc:Choice Requires="p14">
       <p:transition p14:dur="400">
         <p:fade/>
       </p:transition>
     </mc:Choice>
-    <mc:Fallback>
+    <mc:Fallback xmlns="">
       <p:transition>
         <p:fade/>
       </p:transition>
@@ -7637,7 +7838,7 @@
           <p:spPr>
             <a:xfrm>
               <a:off x="933450" y="1600200"/>
-              <a:ext cx="1928336" cy="304800"/>
+              <a:ext cx="1538883" cy="230832"/>
             </a:xfrm>
             <a:prstGeom prst="rect">
               <a:avLst/>
@@ -7663,8 +7864,27 @@
                   <a:ea typeface="Microsoft YaHei"/>
                   <a:cs typeface="Arial"/>
                 </a:rPr>
-                <a:t>为什么不选线性回归</a:t>
-              </a:r>
+                <a:t>线性回归</a:t>
+              </a:r>
+              <a:r>
+                <a:rPr lang="zh-CN" altLang="en-US" sz="1500" b="1" dirty="0">
+                  <a:solidFill>
+                    <a:srgbClr val="E06B5E"/>
+                  </a:solidFill>
+                  <a:latin typeface="Arial"/>
+                  <a:ea typeface="Microsoft YaHei"/>
+                  <a:cs typeface="Arial"/>
+                </a:rPr>
+                <a:t>作为基线</a:t>
+              </a:r>
+              <a:endParaRPr lang="zh-CN" sz="1500" b="1" dirty="0">
+                <a:solidFill>
+                  <a:srgbClr val="E06B5E"/>
+                </a:solidFill>
+                <a:latin typeface="Arial"/>
+                <a:ea typeface="Microsoft YaHei"/>
+                <a:cs typeface="Arial"/>
+              </a:endParaRPr>
             </a:p>
           </p:txBody>
         </p:sp>
@@ -7677,7 +7897,7 @@
           <p:spPr>
             <a:xfrm>
               <a:off x="935355" y="1930718"/>
-              <a:ext cx="4219813" cy="274320"/>
+              <a:ext cx="4866717" cy="207749"/>
             </a:xfrm>
             <a:prstGeom prst="rect">
               <a:avLst/>
@@ -7703,7 +7923,29 @@
                   <a:ea typeface="Microsoft YaHei"/>
                   <a:cs typeface="Arial"/>
                 </a:rPr>
-                <a:t>误差明显较大（RMSE=0.0376），不是简单线性关系</a:t>
+                <a:t>误差明显较大（RMSE=0.0376），</a:t>
+              </a:r>
+              <a:r>
+                <a:rPr lang="zh-CN" altLang="en-US" sz="1350" dirty="0">
+                  <a:solidFill>
+                    <a:srgbClr val="2D2A26"/>
+                  </a:solidFill>
+                  <a:latin typeface="Arial"/>
+                  <a:ea typeface="Microsoft YaHei"/>
+                  <a:cs typeface="Arial"/>
+                </a:rPr>
+                <a:t>说明数据</a:t>
+              </a:r>
+              <a:r>
+                <a:rPr lang="zh-CN" sz="1350" dirty="0">
+                  <a:solidFill>
+                    <a:srgbClr val="2D2A26"/>
+                  </a:solidFill>
+                  <a:latin typeface="Arial"/>
+                  <a:ea typeface="Microsoft YaHei"/>
+                  <a:cs typeface="Arial"/>
+                </a:rPr>
+                <a:t>不是简单线性关系</a:t>
               </a:r>
             </a:p>
           </p:txBody>
@@ -7833,7 +8075,7 @@
           <p:spPr>
             <a:xfrm>
               <a:off x="935355" y="3073718"/>
-              <a:ext cx="3526727" cy="274320"/>
+              <a:ext cx="4039567" cy="207749"/>
             </a:xfrm>
             <a:prstGeom prst="rect">
               <a:avLst/>
@@ -7859,8 +8101,49 @@
                   <a:ea typeface="Microsoft YaHei"/>
                   <a:cs typeface="Arial"/>
                 </a:rPr>
-                <a:t>代表神经网络路线，R² 略高但训练成本更高</a:t>
-              </a:r>
+                <a:t>代表神经网络路线，R² 略高但训练</a:t>
+              </a:r>
+              <a:r>
+                <a:rPr lang="zh-CN" altLang="en-US" sz="1350" dirty="0">
+                  <a:solidFill>
+                    <a:srgbClr val="2D2A26"/>
+                  </a:solidFill>
+                  <a:latin typeface="Arial"/>
+                  <a:ea typeface="Microsoft YaHei"/>
+                  <a:cs typeface="Arial"/>
+                </a:rPr>
+                <a:t>、预测计算量</a:t>
+              </a:r>
+              <a:r>
+                <a:rPr lang="zh-CN" sz="1350" dirty="0">
+                  <a:solidFill>
+                    <a:srgbClr val="2D2A26"/>
+                  </a:solidFill>
+                  <a:latin typeface="Arial"/>
+                  <a:ea typeface="Microsoft YaHei"/>
+                  <a:cs typeface="Arial"/>
+                </a:rPr>
+                <a:t>更</a:t>
+              </a:r>
+              <a:r>
+                <a:rPr lang="zh-CN" altLang="en-US" sz="1350" dirty="0">
+                  <a:solidFill>
+                    <a:srgbClr val="2D2A26"/>
+                  </a:solidFill>
+                  <a:latin typeface="Arial"/>
+                  <a:ea typeface="Microsoft YaHei"/>
+                  <a:cs typeface="Arial"/>
+                </a:rPr>
+                <a:t>大</a:t>
+              </a:r>
+              <a:endParaRPr lang="zh-CN" sz="1350" dirty="0">
+                <a:solidFill>
+                  <a:srgbClr val="2D2A26"/>
+                </a:solidFill>
+                <a:latin typeface="Arial"/>
+                <a:ea typeface="Microsoft YaHei"/>
+                <a:cs typeface="Arial"/>
+              </a:endParaRPr>
             </a:p>
           </p:txBody>
         </p:sp>
@@ -8112,7 +8395,7 @@
           <p:spPr>
             <a:xfrm>
               <a:off x="936308" y="5339239"/>
-              <a:ext cx="3789855" cy="259080"/>
+              <a:ext cx="3351880" cy="196208"/>
             </a:xfrm>
             <a:prstGeom prst="rect">
               <a:avLst/>
@@ -8138,7 +8421,7 @@
                   <a:ea typeface="Microsoft YaHei"/>
                   <a:cs typeface="Arial"/>
                 </a:rPr>
-                <a:t>不只看 R²，也结合 RMSE、训练成本和预测稳定性</a:t>
+                <a:t>不只看 R²，也结合 RMSE、成本和预测稳定性</a:t>
               </a:r>
             </a:p>
           </p:txBody>
@@ -8229,7 +8512,7 @@
           <p:spPr>
             <a:xfrm>
               <a:off x="6741795" y="1488758"/>
-              <a:ext cx="2109618" cy="335280"/>
+              <a:ext cx="1082027" cy="253916"/>
             </a:xfrm>
             <a:prstGeom prst="rect">
               <a:avLst/>
@@ -8255,7 +8538,7 @@
                   <a:ea typeface="Microsoft YaHei"/>
                   <a:cs typeface="Arial"/>
                 </a:rPr>
-                <a:t>RF vs MLP 关键对比</a:t>
+                <a:t>RF vs MLP</a:t>
               </a:r>
             </a:p>
           </p:txBody>
@@ -8604,7 +8887,7 @@
           <p:spPr>
             <a:xfrm>
               <a:off x="6935152" y="4561046"/>
-              <a:ext cx="834295" cy="289560"/>
+              <a:ext cx="365485" cy="219291"/>
             </a:xfrm>
             <a:prstGeom prst="rect">
               <a:avLst/>
@@ -8630,7 +8913,7 @@
                   <a:ea typeface="Microsoft YaHei"/>
                   <a:cs typeface="Arial"/>
                 </a:rPr>
-                <a:t>核心结论</a:t>
+                <a:t>结论</a:t>
               </a:r>
             </a:p>
           </p:txBody>
@@ -8816,13 +9099,13 @@
   <p:clrMapOvr>
     <a:masterClrMapping/>
   </p:clrMapOvr>
-  <mc:AlternateContent xmlns:mc="http://schemas.openxmlformats.org/markup-compatibility/2006">
-    <mc:Choice xmlns:p14="http://schemas.microsoft.com/office/powerpoint/2010/main" Requires="p14">
+  <mc:AlternateContent xmlns:mc="http://schemas.openxmlformats.org/markup-compatibility/2006" xmlns:p14="http://schemas.microsoft.com/office/powerpoint/2010/main">
+    <mc:Choice Requires="p14">
       <p:transition p14:dur="400">
         <p:fade/>
       </p:transition>
     </mc:Choice>
-    <mc:Fallback>
+    <mc:Fallback xmlns="">
       <p:transition>
         <p:fade/>
       </p:transition>
@@ -10850,13 +11133,13 @@
   <p:clrMapOvr>
     <a:masterClrMapping/>
   </p:clrMapOvr>
-  <mc:AlternateContent xmlns:mc="http://schemas.openxmlformats.org/markup-compatibility/2006">
-    <mc:Choice xmlns:p14="http://schemas.microsoft.com/office/powerpoint/2010/main" Requires="p14">
+  <mc:AlternateContent xmlns:mc="http://schemas.openxmlformats.org/markup-compatibility/2006" xmlns:p14="http://schemas.microsoft.com/office/powerpoint/2010/main">
+    <mc:Choice Requires="p14">
       <p:transition p14:dur="400">
         <p:fade/>
       </p:transition>
     </mc:Choice>
-    <mc:Fallback>
+    <mc:Fallback xmlns="">
       <p:transition>
         <p:fade/>
       </p:transition>
@@ -11749,13 +12032,13 @@
   <p:clrMapOvr>
     <a:masterClrMapping/>
   </p:clrMapOvr>
-  <mc:AlternateContent xmlns:mc="http://schemas.openxmlformats.org/markup-compatibility/2006">
-    <mc:Choice xmlns:p14="http://schemas.microsoft.com/office/powerpoint/2010/main" Requires="p14">
+  <mc:AlternateContent xmlns:mc="http://schemas.openxmlformats.org/markup-compatibility/2006" xmlns:p14="http://schemas.microsoft.com/office/powerpoint/2010/main">
+    <mc:Choice Requires="p14">
       <p:transition p14:dur="400">
         <p:fade/>
       </p:transition>
     </mc:Choice>
-    <mc:Fallback>
+    <mc:Fallback xmlns="">
       <p:transition>
         <p:fade/>
       </p:transition>
@@ -13463,13 +13746,13 @@
   <p:clrMapOvr>
     <a:masterClrMapping/>
   </p:clrMapOvr>
-  <mc:AlternateContent xmlns:mc="http://schemas.openxmlformats.org/markup-compatibility/2006">
-    <mc:Choice xmlns:p14="http://schemas.microsoft.com/office/powerpoint/2010/main" Requires="p14">
+  <mc:AlternateContent xmlns:mc="http://schemas.openxmlformats.org/markup-compatibility/2006" xmlns:p14="http://schemas.microsoft.com/office/powerpoint/2010/main">
+    <mc:Choice Requires="p14">
       <p:transition p14:dur="400">
         <p:fade/>
       </p:transition>
     </mc:Choice>
-    <mc:Fallback>
+    <mc:Fallback xmlns:a16="http://schemas.microsoft.com/office/drawing/2014/main" xmlns="">
       <p:transition>
         <p:fade/>
       </p:transition>
@@ -15075,13 +15358,13 @@
   <p:clrMapOvr>
     <a:masterClrMapping/>
   </p:clrMapOvr>
-  <mc:AlternateContent xmlns:mc="http://schemas.openxmlformats.org/markup-compatibility/2006">
-    <mc:Choice xmlns:p14="http://schemas.microsoft.com/office/powerpoint/2010/main" Requires="p14">
+  <mc:AlternateContent xmlns:mc="http://schemas.openxmlformats.org/markup-compatibility/2006" xmlns:p14="http://schemas.microsoft.com/office/powerpoint/2010/main">
+    <mc:Choice Requires="p14">
       <p:transition p14:dur="400">
         <p:fade/>
       </p:transition>
     </mc:Choice>
-    <mc:Fallback>
+    <mc:Fallback xmlns="">
       <p:transition>
         <p:fade/>
       </p:transition>
@@ -15279,9 +15562,9 @@
         <p:grpSpPr>
           <a:xfrm>
             <a:off x="535305" y="379095"/>
-            <a:ext cx="4501844" cy="921067"/>
+            <a:ext cx="4552528" cy="780529"/>
             <a:chOff x="535305" y="379095"/>
-            <a:chExt cx="4501844" cy="921067"/>
+            <a:chExt cx="4552528" cy="780529"/>
           </a:xfrm>
         </p:grpSpPr>
         <p:sp>
@@ -15364,7 +15647,7 @@
           <p:spPr>
             <a:xfrm>
               <a:off x="535305" y="721042"/>
-              <a:ext cx="4501844" cy="579120"/>
+              <a:ext cx="4552528" cy="438582"/>
             </a:xfrm>
             <a:prstGeom prst="rect">
               <a:avLst/>
@@ -15390,8 +15673,27 @@
                   <a:ea typeface="Microsoft YaHei"/>
                   <a:cs typeface="Arial"/>
                 </a:rPr>
-                <a:t>照明不只关乎"够不够亮"</a:t>
-              </a:r>
+                <a:t>照明不只</a:t>
+              </a:r>
+              <a:r>
+                <a:rPr lang="zh-CN" altLang="en-US" sz="2850" b="1" dirty="0">
+                  <a:solidFill>
+                    <a:srgbClr val="2D2A26"/>
+                  </a:solidFill>
+                  <a:latin typeface="Arial"/>
+                  <a:ea typeface="Microsoft YaHei"/>
+                  <a:cs typeface="Arial"/>
+                </a:rPr>
+                <a:t>有亮度和色温维度</a:t>
+              </a:r>
+              <a:endParaRPr lang="zh-CN" sz="2850" b="1" dirty="0">
+                <a:solidFill>
+                  <a:srgbClr val="2D2A26"/>
+                </a:solidFill>
+                <a:latin typeface="Arial"/>
+                <a:ea typeface="Microsoft YaHei"/>
+                <a:cs typeface="Arial"/>
+              </a:endParaRPr>
             </a:p>
           </p:txBody>
         </p:sp>
@@ -16254,18 +16556,143 @@
           </p:txBody>
         </p:sp>
       </p:grpSp>
+      <p:sp>
+        <p:nvSpPr>
+          <p:cNvPr id="100000" name="Rectangle 24"/>
+          <p:cNvSpPr/>
+          <p:nvPr/>
+        </p:nvSpPr>
+        <p:spPr>
+          <a:xfrm>
+            <a:off x="571500" y="4333874"/>
+            <a:ext cx="5262770" cy="960121"/>
+          </a:xfrm>
+          <a:prstGeom prst="roundRect">
+            <a:avLst>
+              <a:gd name="adj" fmla="val 20000"/>
+            </a:avLst>
+          </a:prstGeom>
+          <a:solidFill>
+            <a:schemeClr val="accent4">
+              <a:lumMod val="60000"/>
+              <a:lumOff val="40000"/>
+              <a:alpha val="8000"/>
+            </a:schemeClr>
+          </a:solidFill>
+          <a:ln>
+            <a:noFill/>
+          </a:ln>
+        </p:spPr>
+        <p:txBody>
+          <a:bodyPr/>
+          <a:lstStyle/>
+          <a:p>
+            <a:endParaRPr lang="zh-CN" altLang="en-US"/>
+          </a:p>
+        </p:txBody>
+      </p:sp>
+      <p:sp>
+        <p:nvSpPr>
+          <p:cNvPr id="100001" name="TextBox 25"/>
+          <p:cNvSpPr txBox="1"/>
+          <p:nvPr/>
+        </p:nvSpPr>
+        <p:spPr>
+          <a:xfrm>
+            <a:off x="743903" y="4475226"/>
+            <a:ext cx="4971098" cy="657872"/>
+          </a:xfrm>
+          <a:prstGeom prst="rect">
+            <a:avLst/>
+          </a:prstGeom>
+          <a:noFill/>
+          <a:ln>
+            <a:noFill/>
+          </a:ln>
+        </p:spPr>
+        <p:txBody>
+          <a:bodyPr wrap="square" lIns="0" tIns="0" rIns="0" bIns="0" anchor="t" anchorCtr="0">
+            <a:spAutoFit/>
+          </a:bodyPr>
+          <a:lstStyle/>
+          <a:p>
+            <a:r>
+              <a:rPr lang="en-US" altLang="zh-CN" sz="1425" b="1" dirty="0">
+                <a:solidFill>
+                  <a:schemeClr val="accent4">
+                    <a:lumMod val="75000"/>
+                  </a:schemeClr>
+                </a:solidFill>
+                <a:latin typeface="Arial"/>
+                <a:ea typeface="Microsoft YaHei"/>
+                <a:cs typeface="Arial"/>
+              </a:rPr>
+              <a:t>Ra </a:t>
+            </a:r>
+            <a:r>
+              <a:rPr lang="zh-CN" altLang="en-US" sz="1425" b="1" dirty="0">
+                <a:solidFill>
+                  <a:schemeClr val="accent4">
+                    <a:lumMod val="75000"/>
+                  </a:schemeClr>
+                </a:solidFill>
+                <a:latin typeface="Arial"/>
+                <a:ea typeface="Microsoft YaHei"/>
+                <a:cs typeface="Arial"/>
+              </a:rPr>
+              <a:t>是传统显色评价指标，主要衡量 </a:t>
+            </a:r>
+            <a:r>
+              <a:rPr lang="en-US" altLang="zh-CN" sz="1425" b="1" dirty="0">
+                <a:solidFill>
+                  <a:schemeClr val="accent4">
+                    <a:lumMod val="75000"/>
+                  </a:schemeClr>
+                </a:solidFill>
+                <a:latin typeface="Arial"/>
+                <a:ea typeface="Microsoft YaHei"/>
+                <a:cs typeface="Arial"/>
+              </a:rPr>
+              <a:t>8 </a:t>
+            </a:r>
+            <a:r>
+              <a:rPr lang="zh-CN" altLang="en-US" sz="1425" b="1" dirty="0">
+                <a:solidFill>
+                  <a:schemeClr val="accent4">
+                    <a:lumMod val="75000"/>
+                  </a:schemeClr>
+                </a:solidFill>
+                <a:latin typeface="Arial"/>
+                <a:ea typeface="Microsoft YaHei"/>
+                <a:cs typeface="Arial"/>
+              </a:rPr>
+              <a:t>个低饱和标准色样的平均色差，因此对高饱和颜色、红色表现、肤色质感和光谱缺陷不敏感，不能作为光照质量的完整指标。</a:t>
+            </a:r>
+            <a:endParaRPr lang="zh-CN" altLang="zh-CN" sz="1425" b="1" dirty="0">
+              <a:solidFill>
+                <a:schemeClr val="accent4">
+                  <a:lumMod val="75000"/>
+                </a:schemeClr>
+              </a:solidFill>
+              <a:latin typeface="Arial"/>
+              <a:ea typeface="Microsoft YaHei"/>
+              <a:cs typeface="Arial"/>
+            </a:endParaRPr>
+          </a:p>
+        </p:txBody>
+      </p:sp>
     </p:spTree>
   </p:cSld>
   <p:clrMapOvr>
     <a:masterClrMapping/>
   </p:clrMapOvr>
-  <mc:AlternateContent xmlns:mc="http://schemas.openxmlformats.org/markup-compatibility/2006">
-    <mc:Choice xmlns:p14="http://schemas.microsoft.com/office/powerpoint/2010/main" Requires="p14">
+  <mc:AlternateContent xmlns:mc="http://schemas.openxmlformats.org/markup-compatibility/2006" xmlns:p14="http://schemas.microsoft.com/office/powerpoint/2010/main">
+    <mc:Choice Requires="p14">
       <p:transition p14:dur="400">
         <p:fade/>
       </p:transition>
     </mc:Choice>
-    <mc:Fallback>
+    <mc:Fallback xmlns="">
       <p:transition>
         <p:fade/>
       </p:transition>
@@ -16420,6 +16847,297 @@
                             </p:childTnLst>
                           </p:cTn>
                         </p:par>
+                        <p:par>
+                          <p:cTn id="16" fill="hold">
+                            <p:stCondLst>
+                              <p:cond delay="2200"/>
+                            </p:stCondLst>
+                            <p:childTnLst>
+                              <p:par>
+                                <p:cTn id="17" presetID="2" presetClass="entr" presetSubtype="4" fill="hold" grpId="0" nodeType="afterEffect">
+                                  <p:stCondLst>
+                                    <p:cond delay="0"/>
+                                  </p:stCondLst>
+                                  <p:childTnLst>
+                                    <p:set>
+                                      <p:cBhvr>
+                                        <p:cTn id="18" dur="1" fill="hold">
+                                          <p:stCondLst>
+                                            <p:cond delay="0"/>
+                                          </p:stCondLst>
+                                        </p:cTn>
+                                        <p:tgtEl>
+                                          <p:spTgt spid="25"/>
+                                        </p:tgtEl>
+                                        <p:attrNameLst>
+                                          <p:attrName>style.visibility</p:attrName>
+                                        </p:attrNameLst>
+                                      </p:cBhvr>
+                                      <p:to>
+                                        <p:strVal val="visible"/>
+                                      </p:to>
+                                    </p:set>
+                                    <p:anim calcmode="lin" valueType="num">
+                                      <p:cBhvr additive="base">
+                                        <p:cTn id="19" dur="500" fill="hold"/>
+                                        <p:tgtEl>
+                                          <p:spTgt spid="25"/>
+                                        </p:tgtEl>
+                                        <p:attrNameLst>
+                                          <p:attrName>ppt_x</p:attrName>
+                                        </p:attrNameLst>
+                                      </p:cBhvr>
+                                      <p:tavLst>
+                                        <p:tav tm="0">
+                                          <p:val>
+                                            <p:strVal val="#ppt_x"/>
+                                          </p:val>
+                                        </p:tav>
+                                        <p:tav tm="100000">
+                                          <p:val>
+                                            <p:strVal val="#ppt_x"/>
+                                          </p:val>
+                                        </p:tav>
+                                      </p:tavLst>
+                                    </p:anim>
+                                    <p:anim calcmode="lin" valueType="num">
+                                      <p:cBhvr additive="base">
+                                        <p:cTn id="20" dur="500" fill="hold"/>
+                                        <p:tgtEl>
+                                          <p:spTgt spid="25"/>
+                                        </p:tgtEl>
+                                        <p:attrNameLst>
+                                          <p:attrName>ppt_y</p:attrName>
+                                        </p:attrNameLst>
+                                      </p:cBhvr>
+                                      <p:tavLst>
+                                        <p:tav tm="0">
+                                          <p:val>
+                                            <p:strVal val="1+#ppt_h/2"/>
+                                          </p:val>
+                                        </p:tav>
+                                        <p:tav tm="100000">
+                                          <p:val>
+                                            <p:strVal val="#ppt_y"/>
+                                          </p:val>
+                                        </p:tav>
+                                      </p:tavLst>
+                                    </p:anim>
+                                  </p:childTnLst>
+                                </p:cTn>
+                              </p:par>
+                            </p:childTnLst>
+                          </p:cTn>
+                        </p:par>
+                        <p:par>
+                          <p:cTn id="21" fill="hold">
+                            <p:stCondLst>
+                              <p:cond delay="2700"/>
+                            </p:stCondLst>
+                            <p:childTnLst>
+                              <p:par>
+                                <p:cTn id="22" presetID="2" presetClass="entr" presetSubtype="4" fill="hold" grpId="0" nodeType="afterEffect">
+                                  <p:stCondLst>
+                                    <p:cond delay="0"/>
+                                  </p:stCondLst>
+                                  <p:childTnLst>
+                                    <p:set>
+                                      <p:cBhvr>
+                                        <p:cTn id="23" dur="1" fill="hold">
+                                          <p:stCondLst>
+                                            <p:cond delay="0"/>
+                                          </p:stCondLst>
+                                        </p:cTn>
+                                        <p:tgtEl>
+                                          <p:spTgt spid="24"/>
+                                        </p:tgtEl>
+                                        <p:attrNameLst>
+                                          <p:attrName>style.visibility</p:attrName>
+                                        </p:attrNameLst>
+                                      </p:cBhvr>
+                                      <p:to>
+                                        <p:strVal val="visible"/>
+                                      </p:to>
+                                    </p:set>
+                                    <p:anim calcmode="lin" valueType="num">
+                                      <p:cBhvr additive="base">
+                                        <p:cTn id="24" dur="500" fill="hold"/>
+                                        <p:tgtEl>
+                                          <p:spTgt spid="24"/>
+                                        </p:tgtEl>
+                                        <p:attrNameLst>
+                                          <p:attrName>ppt_x</p:attrName>
+                                        </p:attrNameLst>
+                                      </p:cBhvr>
+                                      <p:tavLst>
+                                        <p:tav tm="0">
+                                          <p:val>
+                                            <p:strVal val="#ppt_x"/>
+                                          </p:val>
+                                        </p:tav>
+                                        <p:tav tm="100000">
+                                          <p:val>
+                                            <p:strVal val="#ppt_x"/>
+                                          </p:val>
+                                        </p:tav>
+                                      </p:tavLst>
+                                    </p:anim>
+                                    <p:anim calcmode="lin" valueType="num">
+                                      <p:cBhvr additive="base">
+                                        <p:cTn id="25" dur="500" fill="hold"/>
+                                        <p:tgtEl>
+                                          <p:spTgt spid="24"/>
+                                        </p:tgtEl>
+                                        <p:attrNameLst>
+                                          <p:attrName>ppt_y</p:attrName>
+                                        </p:attrNameLst>
+                                      </p:cBhvr>
+                                      <p:tavLst>
+                                        <p:tav tm="0">
+                                          <p:val>
+                                            <p:strVal val="1+#ppt_h/2"/>
+                                          </p:val>
+                                        </p:tav>
+                                        <p:tav tm="100000">
+                                          <p:val>
+                                            <p:strVal val="#ppt_y"/>
+                                          </p:val>
+                                        </p:tav>
+                                      </p:tavLst>
+                                    </p:anim>
+                                  </p:childTnLst>
+                                </p:cTn>
+                              </p:par>
+                            </p:childTnLst>
+                          </p:cTn>
+                        </p:par>
+                      </p:childTnLst>
+                    </p:cTn>
+                  </p:par>
+                  <p:par>
+                    <p:cTn id="26" fill="hold">
+                      <p:stCondLst>
+                        <p:cond delay="0"/>
+                      </p:stCondLst>
+                      <p:childTnLst>
+                        <p:par>
+                          <p:cTn id="27" fill="hold">
+                            <p:stCondLst>
+                              <p:cond delay="0"/>
+                            </p:stCondLst>
+                            <p:childTnLst>
+                              <p:par>
+                                <p:cTn id="28" presetID="2" presetClass="entr" presetSubtype="4" fill="hold" grpId="1" nodeType="afterEffect">
+                                  <p:stCondLst>
+                                    <p:cond delay="0"/>
+                                  </p:stCondLst>
+                                  <p:childTnLst>
+                                    <p:set>
+                                      <p:cBhvr>
+                                        <p:cTn id="29" dur="1" fill="hold">
+                                          <p:stCondLst>
+                                            <p:cond delay="0"/>
+                                          </p:stCondLst>
+                                        </p:cTn>
+                                        <p:tgtEl>
+                                          <p:spTgt spid="100000"/>
+                                        </p:tgtEl>
+                                        <p:attrNameLst>
+                                          <p:attrName>style.visibility</p:attrName>
+                                        </p:attrNameLst>
+                                      </p:cBhvr>
+                                      <p:to>
+                                        <p:strVal val="visible"/>
+                                      </p:to>
+                                    </p:set>
+                                    <p:anim calcmode="lin" valueType="num">
+                                      <p:cBhvr additive="base">
+                                        <p:cTn id="30" dur="500" fill="hold"/>
+                                        <p:tgtEl>
+                                          <p:spTgt spid="100000"/>
+                                        </p:tgtEl>
+                                        <p:attrNameLst>
+                                          <p:attrName>ppt_y</p:attrName>
+                                        </p:attrNameLst>
+                                      </p:cBhvr>
+                                      <p:tavLst>
+                                        <p:tav tm="0">
+                                          <p:val>
+                                            <p:strVal val="1+#ppt_h/2"/>
+                                          </p:val>
+                                        </p:tav>
+                                        <p:tav tm="100000">
+                                          <p:val>
+                                            <p:strVal val="#ppt_y"/>
+                                          </p:val>
+                                        </p:tav>
+                                      </p:tavLst>
+                                    </p:anim>
+                                  </p:childTnLst>
+                                </p:cTn>
+                              </p:par>
+                            </p:childTnLst>
+                          </p:cTn>
+                        </p:par>
+                        <p:par>
+                          <p:cTn id="31" fill="hold">
+                            <p:stCondLst>
+                              <p:cond delay="0"/>
+                            </p:stCondLst>
+                            <p:childTnLst>
+                              <p:par>
+                                <p:cTn id="32" presetID="2" presetClass="entr" presetSubtype="4" fill="hold" grpId="2" nodeType="withEffect">
+                                  <p:stCondLst>
+                                    <p:cond delay="0"/>
+                                  </p:stCondLst>
+                                  <p:childTnLst>
+                                    <p:set>
+                                      <p:cBhvr>
+                                        <p:cTn id="33" dur="1" fill="hold">
+                                          <p:stCondLst>
+                                            <p:cond delay="0"/>
+                                          </p:stCondLst>
+                                        </p:cTn>
+                                        <p:tgtEl>
+                                          <p:spTgt spid="100001"/>
+                                        </p:tgtEl>
+                                        <p:attrNameLst>
+                                          <p:attrName>style.visibility</p:attrName>
+                                        </p:attrNameLst>
+                                      </p:cBhvr>
+                                      <p:to>
+                                        <p:strVal val="visible"/>
+                                      </p:to>
+                                    </p:set>
+                                    <p:anim calcmode="lin" valueType="num">
+                                      <p:cBhvr additive="base">
+                                        <p:cTn id="34" dur="500" fill="hold"/>
+                                        <p:tgtEl>
+                                          <p:spTgt spid="100001"/>
+                                        </p:tgtEl>
+                                        <p:attrNameLst>
+                                          <p:attrName>ppt_y</p:attrName>
+                                        </p:attrNameLst>
+                                      </p:cBhvr>
+                                      <p:tavLst>
+                                        <p:tav tm="0">
+                                          <p:val>
+                                            <p:strVal val="1+#ppt_h/2"/>
+                                          </p:val>
+                                        </p:tav>
+                                        <p:tav tm="100000">
+                                          <p:val>
+                                            <p:strVal val="#ppt_y"/>
+                                          </p:val>
+                                        </p:tav>
+                                      </p:tavLst>
+                                    </p:anim>
+                                  </p:childTnLst>
+                                </p:cTn>
+                              </p:par>
+                            </p:childTnLst>
+                          </p:cTn>
+                        </p:par>
                       </p:childTnLst>
                     </p:cTn>
                   </p:par>
@@ -16447,7 +17165,11 @@
     <p:bldLst>
       <p:bldP spid="21" grpId="0"/>
       <p:bldP spid="23" grpId="0"/>
+      <p:bldP spid="24" grpId="0" animBg="1"/>
+      <p:bldP spid="25" grpId="0"/>
       <p:bldP spid="29" grpId="0"/>
+      <p:bldP spid="100000" grpId="1" animBg="1"/>
+      <p:bldP spid="100001" grpId="2"/>
     </p:bldLst>
   </p:timing>
 </p:sld>
@@ -16508,9 +17230,9 @@
         <p:grpSpPr>
           <a:xfrm>
             <a:off x="535305" y="379095"/>
-            <a:ext cx="6058138" cy="921067"/>
+            <a:ext cx="2192908" cy="780529"/>
             <a:chOff x="535305" y="379095"/>
-            <a:chExt cx="6058138" cy="921067"/>
+            <a:chExt cx="2192908" cy="780529"/>
           </a:xfrm>
         </p:grpSpPr>
         <p:sp>
@@ -16593,7 +17315,7 @@
           <p:spPr>
             <a:xfrm>
               <a:off x="535305" y="721042"/>
-              <a:ext cx="6058138" cy="579120"/>
+              <a:ext cx="2192908" cy="438582"/>
             </a:xfrm>
             <a:prstGeom prst="rect">
               <a:avLst/>
@@ -16619,8 +17341,27 @@
                   <a:ea typeface="Microsoft YaHei"/>
                   <a:cs typeface="Arial"/>
                 </a:rPr>
-                <a:t>光谱有价值，但直接测量成本较高</a:t>
-              </a:r>
+                <a:t>光谱</a:t>
+              </a:r>
+              <a:r>
+                <a:rPr lang="zh-CN" altLang="en-US" sz="2850" b="1" dirty="0">
+                  <a:solidFill>
+                    <a:srgbClr val="2D2A26"/>
+                  </a:solidFill>
+                  <a:latin typeface="Arial"/>
+                  <a:ea typeface="Microsoft YaHei"/>
+                  <a:cs typeface="Arial"/>
+                </a:rPr>
+                <a:t>如何获取</a:t>
+              </a:r>
+              <a:endParaRPr lang="zh-CN" sz="2850" b="1" dirty="0">
+                <a:solidFill>
+                  <a:srgbClr val="2D2A26"/>
+                </a:solidFill>
+                <a:latin typeface="Arial"/>
+                <a:ea typeface="Microsoft YaHei"/>
+                <a:cs typeface="Arial"/>
+              </a:endParaRPr>
             </a:p>
           </p:txBody>
         </p:sp>
@@ -17577,13 +18318,13 @@
   <p:clrMapOvr>
     <a:masterClrMapping/>
   </p:clrMapOvr>
-  <mc:AlternateContent xmlns:mc="http://schemas.openxmlformats.org/markup-compatibility/2006">
-    <mc:Choice xmlns:p14="http://schemas.microsoft.com/office/powerpoint/2010/main" Requires="p14">
+  <mc:AlternateContent xmlns:mc="http://schemas.openxmlformats.org/markup-compatibility/2006" xmlns:p14="http://schemas.microsoft.com/office/powerpoint/2010/main">
+    <mc:Choice Requires="p14">
       <p:transition p14:dur="400">
         <p:fade/>
       </p:transition>
     </mc:Choice>
-    <mc:Fallback>
+    <mc:Fallback xmlns="">
       <p:transition>
         <p:fade/>
       </p:transition>
@@ -17736,9 +18477,9 @@
         <p:grpSpPr>
           <a:xfrm>
             <a:off x="535305" y="379095"/>
-            <a:ext cx="6856238" cy="921067"/>
+            <a:ext cx="3638817" cy="780529"/>
             <a:chOff x="535305" y="379095"/>
-            <a:chExt cx="6856238" cy="921067"/>
+            <a:chExt cx="3638817" cy="780529"/>
           </a:xfrm>
         </p:grpSpPr>
         <p:sp>
@@ -17821,7 +18562,7 @@
           <p:spPr>
             <a:xfrm>
               <a:off x="535305" y="721042"/>
-              <a:ext cx="6856238" cy="579120"/>
+              <a:ext cx="3638817" cy="438582"/>
             </a:xfrm>
             <a:prstGeom prst="rect">
               <a:avLst/>
@@ -17839,6 +18580,17 @@
             <a:p>
               <a:pPr algn="l"/>
               <a:r>
+                <a:rPr lang="zh-CN" altLang="en-US" sz="2850" b="1" dirty="0">
+                  <a:solidFill>
+                    <a:srgbClr val="2D2A26"/>
+                  </a:solidFill>
+                  <a:latin typeface="Arial"/>
+                  <a:ea typeface="Microsoft YaHei"/>
+                  <a:cs typeface="Arial"/>
+                </a:rPr>
+                <a:t>基于公开</a:t>
+              </a:r>
+              <a:r>
                 <a:rPr lang="zh-CN" sz="2850" b="1" dirty="0">
                   <a:solidFill>
                     <a:srgbClr val="2D2A26"/>
@@ -17847,7 +18599,7 @@
                   <a:ea typeface="Microsoft YaHei"/>
                   <a:cs typeface="Arial"/>
                 </a:rPr>
-                <a:t>把真实观测数据整理成可训练的数据表</a:t>
+                <a:t>观测数据训练</a:t>
               </a:r>
             </a:p>
           </p:txBody>
@@ -19934,13 +20686,13 @@
   <p:clrMapOvr>
     <a:masterClrMapping/>
   </p:clrMapOvr>
-  <mc:AlternateContent xmlns:mc="http://schemas.openxmlformats.org/markup-compatibility/2006">
-    <mc:Choice xmlns:p14="http://schemas.microsoft.com/office/powerpoint/2010/main" Requires="p14">
+  <mc:AlternateContent xmlns:mc="http://schemas.openxmlformats.org/markup-compatibility/2006" xmlns:p14="http://schemas.microsoft.com/office/powerpoint/2010/main">
+    <mc:Choice Requires="p14">
       <p:transition p14:dur="400">
         <p:fade/>
       </p:transition>
     </mc:Choice>
-    <mc:Fallback>
+    <mc:Fallback xmlns="">
       <p:transition>
         <p:fade/>
       </p:transition>
@@ -20831,7 +21583,7 @@
             <a:blip>
               <a:extLst>
                 <a:ext uri="{96DAC541-7B7A-43D3-8B79-37D633B846F1}">
-                  <asvg:svgBlip xmlns:asvg="http://schemas.microsoft.com/office/drawing/2016/SVG/main" r:embed="rId5"/>
+                  <asvg:svgBlip xmlns:asvg="http://schemas.microsoft.com/office/drawing/2016/SVG/main" r:embed="rId7"/>
                 </a:ext>
               </a:extLst>
             </a:blip>
@@ -20901,7 +21653,7 @@
             <a:blip>
               <a:extLst>
                 <a:ext uri="{96DAC541-7B7A-43D3-8B79-37D633B846F1}">
-                  <asvg:svgBlip xmlns:asvg="http://schemas.microsoft.com/office/drawing/2016/SVG/main" r:embed="rId5"/>
+                  <asvg:svgBlip xmlns:asvg="http://schemas.microsoft.com/office/drawing/2016/SVG/main" r:embed="rId7"/>
                 </a:ext>
               </a:extLst>
             </a:blip>
@@ -20971,7 +21723,7 @@
             <a:blip>
               <a:extLst>
                 <a:ext uri="{96DAC541-7B7A-43D3-8B79-37D633B846F1}">
-                  <asvg:svgBlip xmlns:asvg="http://schemas.microsoft.com/office/drawing/2016/SVG/main" r:embed="rId7"/>
+                  <asvg:svgBlip xmlns:asvg="http://schemas.microsoft.com/office/drawing/2016/SVG/main" r:embed="rId8"/>
                 </a:ext>
               </a:extLst>
             </a:blip>
@@ -21238,7 +21990,7 @@
             <p:nvPr/>
           </p:nvPicPr>
           <p:blipFill>
-            <a:blip r:embed="rId8"/>
+            <a:blip r:embed="rId9"/>
             <a:stretch>
               <a:fillRect/>
             </a:stretch>
@@ -21425,13 +22177,13 @@
   <p:clrMapOvr>
     <a:masterClrMapping/>
   </p:clrMapOvr>
-  <mc:AlternateContent xmlns:mc="http://schemas.openxmlformats.org/markup-compatibility/2006">
-    <mc:Choice xmlns:p14="http://schemas.microsoft.com/office/powerpoint/2010/main" Requires="p14">
+  <mc:AlternateContent xmlns:mc="http://schemas.openxmlformats.org/markup-compatibility/2006" xmlns:p14="http://schemas.microsoft.com/office/powerpoint/2010/main">
+    <mc:Choice Requires="p14">
       <p:transition p14:dur="400">
         <p:fade/>
       </p:transition>
     </mc:Choice>
-    <mc:Fallback>
+    <mc:Fallback xmlns:asvg="http://schemas.microsoft.com/office/drawing/2016/SVG/main" xmlns="">
       <p:transition>
         <p:fade/>
       </p:transition>
@@ -21616,7 +22368,7 @@
           <a:bodyPr/>
           <a:lstStyle/>
           <a:p>
-            <a:endParaRPr lang="zh-CN" altLang="en-US"/>
+            <a:endParaRPr lang="zh-CN" altLang="en-US" dirty="0"/>
           </a:p>
         </p:txBody>
       </p:sp>
@@ -21629,9 +22381,9 @@
         <p:grpSpPr>
           <a:xfrm>
             <a:off x="535305" y="379095"/>
-            <a:ext cx="4621559" cy="921067"/>
+            <a:ext cx="3432030" cy="780529"/>
             <a:chOff x="535305" y="379095"/>
-            <a:chExt cx="4621559" cy="921067"/>
+            <a:chExt cx="3432030" cy="780529"/>
           </a:xfrm>
         </p:grpSpPr>
         <p:sp>
@@ -21714,7 +22466,7 @@
           <p:spPr>
             <a:xfrm>
               <a:off x="535305" y="721042"/>
-              <a:ext cx="4621559" cy="579120"/>
+              <a:ext cx="3432030" cy="438582"/>
             </a:xfrm>
             <a:prstGeom prst="rect">
               <a:avLst/>
@@ -21740,7 +22492,7 @@
                   <a:ea typeface="Microsoft YaHei"/>
                   <a:cs typeface="Arial"/>
                 </a:rPr>
-                <a:t>模型输出：41 维相对光谱</a:t>
+                <a:t>输出：41 维相对光谱</a:t>
               </a:r>
             </a:p>
           </p:txBody>
@@ -21755,9 +22507,9 @@
         <p:grpSpPr>
           <a:xfrm>
             <a:off x="571500" y="1238250"/>
-            <a:ext cx="5334000" cy="4000500"/>
+            <a:ext cx="11049002" cy="4000500"/>
             <a:chOff x="571500" y="1238250"/>
-            <a:chExt cx="5334000" cy="4000500"/>
+            <a:chExt cx="11049002" cy="4000500"/>
           </a:xfrm>
         </p:grpSpPr>
         <p:sp>
@@ -21799,7 +22551,7 @@
           </p:nvSpPr>
           <p:spPr>
             <a:xfrm>
-              <a:off x="571500" y="1238250"/>
+              <a:off x="6286502" y="4993481"/>
               <a:ext cx="5334000" cy="47625"/>
             </a:xfrm>
             <a:prstGeom prst="roundRect">
@@ -21895,52 +22647,21 @@
         </p:nvGrpSpPr>
         <p:grpSpPr>
           <a:xfrm>
-            <a:off x="6191250" y="1238250"/>
-            <a:ext cx="5429250" cy="4000500"/>
-            <a:chOff x="6191250" y="1238250"/>
-            <a:chExt cx="5429250" cy="4000500"/>
+            <a:off x="523875" y="4714875"/>
+            <a:ext cx="10810875" cy="1943100"/>
+            <a:chOff x="523875" y="4714875"/>
+            <a:chExt cx="10810875" cy="1943100"/>
           </a:xfrm>
         </p:grpSpPr>
         <p:sp>
           <p:nvSpPr>
-            <p:cNvPr id="12" name="Rectangle 12"/>
-            <p:cNvSpPr/>
-            <p:nvPr/>
-          </p:nvSpPr>
-          <p:spPr>
-            <a:xfrm>
-              <a:off x="6191250" y="1238250"/>
-              <a:ext cx="5429250" cy="4000500"/>
-            </a:xfrm>
-            <a:prstGeom prst="roundRect">
-              <a:avLst>
-                <a:gd name="adj" fmla="val 2857"/>
-              </a:avLst>
-            </a:prstGeom>
-            <a:solidFill>
-              <a:srgbClr val="FFF8EE"/>
-            </a:solidFill>
-            <a:ln>
-              <a:noFill/>
-            </a:ln>
-          </p:spPr>
-          <p:txBody>
-            <a:bodyPr/>
-            <a:lstStyle/>
-            <a:p>
-              <a:endParaRPr lang="zh-CN" altLang="en-US"/>
-            </a:p>
-          </p:txBody>
-        </p:sp>
-        <p:sp>
-          <p:nvSpPr>
             <p:cNvPr id="13" name="Rectangle 13"/>
             <p:cNvSpPr/>
             <p:nvPr/>
           </p:nvSpPr>
           <p:spPr>
             <a:xfrm>
-              <a:off x="6191250" y="1238250"/>
+              <a:off x="523875" y="5267325"/>
               <a:ext cx="5429250" cy="47625"/>
             </a:xfrm>
             <a:prstGeom prst="roundRect">
@@ -21971,7 +22692,7 @@
           </p:nvSpPr>
           <p:spPr>
             <a:xfrm>
-              <a:off x="6360795" y="1488758"/>
+              <a:off x="564737" y="5332235"/>
               <a:ext cx="966026" cy="335280"/>
             </a:xfrm>
             <a:prstGeom prst="rect">
@@ -22011,8 +22732,8 @@
           </p:nvSpPr>
           <p:spPr>
             <a:xfrm>
-              <a:off x="6362700" y="1838325"/>
-              <a:ext cx="2324100" cy="914400"/>
+              <a:off x="566642" y="5681802"/>
+              <a:ext cx="4455796" cy="914400"/>
             </a:xfrm>
             <a:prstGeom prst="rect">
               <a:avLst/>
@@ -22047,13 +22768,117 @@
         </p:sp>
         <p:sp>
           <p:nvSpPr>
-            <p:cNvPr id="16" name="Line 16"/>
+            <p:cNvPr id="17" name="TextBox 17"/>
+            <p:cNvSpPr txBox="1"/>
+            <p:nvPr/>
+          </p:nvSpPr>
+          <p:spPr>
+            <a:xfrm>
+              <a:off x="6345783" y="5134928"/>
+              <a:ext cx="1647561" cy="335280"/>
+            </a:xfrm>
+            <a:prstGeom prst="rect">
+              <a:avLst/>
+            </a:prstGeom>
+            <a:noFill/>
+            <a:ln>
+              <a:noFill/>
+            </a:ln>
+          </p:spPr>
+          <p:txBody>
+            <a:bodyPr wrap="none" lIns="0" tIns="0" rIns="0" bIns="0" anchor="t" anchorCtr="0">
+              <a:spAutoFit/>
+            </a:bodyPr>
+            <a:lstStyle/>
+            <a:p>
+              <a:pPr algn="l"/>
+              <a:r>
+                <a:rPr lang="zh-CN" sz="1650" b="1" dirty="0">
+                  <a:solidFill>
+                    <a:srgbClr val="8B6DB0"/>
+                  </a:solidFill>
+                  <a:latin typeface="Arial"/>
+                  <a:ea typeface="Microsoft YaHei"/>
+                  <a:cs typeface="Arial"/>
+                </a:rPr>
+                <a:t>为什么需要 PCA</a:t>
+              </a:r>
+            </a:p>
+          </p:txBody>
+        </p:sp>
+        <p:sp>
+          <p:nvSpPr>
+            <p:cNvPr id="18" name="TextBox 18"/>
+            <p:cNvSpPr txBox="1"/>
+            <p:nvPr/>
+          </p:nvSpPr>
+          <p:spPr>
+            <a:xfrm>
+              <a:off x="6347688" y="5484495"/>
+              <a:ext cx="4987062" cy="914400"/>
+            </a:xfrm>
+            <a:prstGeom prst="rect">
+              <a:avLst/>
+            </a:prstGeom>
+            <a:noFill/>
+            <a:ln>
+              <a:noFill/>
+            </a:ln>
+          </p:spPr>
+          <p:txBody>
+            <a:bodyPr wrap="square" lIns="0" tIns="0" rIns="0" bIns="0" anchor="t" anchorCtr="0"/>
+            <a:lstStyle/>
+            <a:p>
+              <a:pPr algn="l">
+                <a:lnSpc>
+                  <a:spcPts val="2400"/>
+                </a:lnSpc>
+              </a:pPr>
+              <a:r>
+                <a:rPr lang="zh-CN" sz="1500" dirty="0">
+                  <a:solidFill>
+                    <a:srgbClr val="2D2A26"/>
+                  </a:solidFill>
+                  <a:latin typeface="Arial"/>
+                  <a:ea typeface="Microsoft YaHei"/>
+                  <a:cs typeface="Arial"/>
+                </a:rPr>
+                <a:t>光谱曲线连续变化，相邻波长</a:t>
+              </a:r>
+              <a:r>
+                <a:rPr lang="zh-CN" altLang="en-US" sz="1500" dirty="0">
+                  <a:solidFill>
+                    <a:srgbClr val="2D2A26"/>
+                  </a:solidFill>
+                  <a:latin typeface="Arial"/>
+                  <a:ea typeface="Microsoft YaHei"/>
+                  <a:cs typeface="Arial"/>
+                </a:rPr>
+                <a:t>值</a:t>
+              </a:r>
+              <a:r>
+                <a:rPr lang="zh-CN" sz="1500" dirty="0">
+                  <a:solidFill>
+                    <a:srgbClr val="2D2A26"/>
+                  </a:solidFill>
+                  <a:latin typeface="Arial"/>
+                  <a:ea typeface="Microsoft YaHei"/>
+                  <a:cs typeface="Arial"/>
+                </a:rPr>
+                <a:t>高度相关 → 适合 PCA 压缩直接预测 41 维会增加模型难度</a:t>
+              </a:r>
+            </a:p>
+          </p:txBody>
+        </p:sp>
+        <p:sp>
+          <p:nvSpPr>
+            <p:cNvPr id="19" name="Line 19"/>
             <p:cNvSpPr/>
             <p:nvPr/>
           </p:nvSpPr>
           <p:spPr>
             <a:xfrm>
-              <a:off x="6381750" y="3048000"/>
+              <a:off x="6381750" y="4714875"/>
               <a:ext cx="4953000" cy="9525"/>
             </a:xfrm>
             <a:custGeom>
@@ -22084,132 +22909,7 @@
             <a:bodyPr/>
             <a:lstStyle/>
             <a:p>
-              <a:endParaRPr lang="zh-CN" altLang="en-US"/>
-            </a:p>
-          </p:txBody>
-        </p:sp>
-        <p:sp>
-          <p:nvSpPr>
-            <p:cNvPr id="17" name="TextBox 17"/>
-            <p:cNvSpPr txBox="1"/>
-            <p:nvPr/>
-          </p:nvSpPr>
-          <p:spPr>
-            <a:xfrm>
-              <a:off x="6360795" y="3203258"/>
-              <a:ext cx="1647561" cy="335280"/>
-            </a:xfrm>
-            <a:prstGeom prst="rect">
-              <a:avLst/>
-            </a:prstGeom>
-            <a:noFill/>
-            <a:ln>
-              <a:noFill/>
-            </a:ln>
-          </p:spPr>
-          <p:txBody>
-            <a:bodyPr wrap="none" lIns="0" tIns="0" rIns="0" bIns="0" anchor="t" anchorCtr="0">
-              <a:spAutoFit/>
-            </a:bodyPr>
-            <a:lstStyle/>
-            <a:p>
-              <a:pPr algn="l"/>
-              <a:r>
-                <a:rPr lang="zh-CN" sz="1650" b="1" dirty="0">
-                  <a:solidFill>
-                    <a:srgbClr val="8B6DB0"/>
-                  </a:solidFill>
-                  <a:latin typeface="Arial"/>
-                  <a:ea typeface="Microsoft YaHei"/>
-                  <a:cs typeface="Arial"/>
-                </a:rPr>
-                <a:t>为什么需要 PCA</a:t>
-              </a:r>
-            </a:p>
-          </p:txBody>
-        </p:sp>
-        <p:sp>
-          <p:nvSpPr>
-            <p:cNvPr id="18" name="TextBox 18"/>
-            <p:cNvSpPr txBox="1"/>
-            <p:nvPr/>
-          </p:nvSpPr>
-          <p:spPr>
-            <a:xfrm>
-              <a:off x="6362700" y="3552825"/>
-              <a:ext cx="2647950" cy="914400"/>
-            </a:xfrm>
-            <a:prstGeom prst="rect">
-              <a:avLst/>
-            </a:prstGeom>
-            <a:noFill/>
-            <a:ln>
-              <a:noFill/>
-            </a:ln>
-          </p:spPr>
-          <p:txBody>
-            <a:bodyPr wrap="square" lIns="0" tIns="0" rIns="0" bIns="0" anchor="t" anchorCtr="0"/>
-            <a:lstStyle/>
-            <a:p>
-              <a:pPr algn="l">
-                <a:lnSpc>
-                  <a:spcPts val="2400"/>
-                </a:lnSpc>
-              </a:pPr>
-              <a:r>
-                <a:rPr lang="zh-CN" sz="1500" dirty="0">
-                  <a:solidFill>
-                    <a:srgbClr val="2D2A26"/>
-                  </a:solidFill>
-                  <a:latin typeface="Arial"/>
-                  <a:ea typeface="Microsoft YaHei"/>
-                  <a:cs typeface="Arial"/>
-                </a:rPr>
-                <a:t>光谱曲线连续变化，相邻波长高度相关 → 适合 PCA 压缩直接预测 41 维会增加模型难度</a:t>
-              </a:r>
-            </a:p>
-          </p:txBody>
-        </p:sp>
-        <p:sp>
-          <p:nvSpPr>
-            <p:cNvPr id="19" name="Line 19"/>
-            <p:cNvSpPr/>
-            <p:nvPr/>
-          </p:nvSpPr>
-          <p:spPr>
-            <a:xfrm>
-              <a:off x="6381750" y="4714875"/>
-              <a:ext cx="4953000" cy="9525"/>
-            </a:xfrm>
-            <a:custGeom>
-              <a:avLst/>
-              <a:gdLst/>
-              <a:ahLst/>
-              <a:cxnLst/>
-              <a:rect l="l" t="t" r="r" b="b"/>
-              <a:pathLst>
-                <a:path w="4953000" h="9525">
-                  <a:moveTo>
-                    <a:pt x="0" y="0"/>
-                  </a:moveTo>
-                  <a:lnTo>
-                    <a:pt x="4953000" y="0"/>
-                  </a:lnTo>
-                </a:path>
-              </a:pathLst>
-            </a:custGeom>
-            <a:noFill/>
-            <a:ln w="9525">
-              <a:solidFill>
-                <a:srgbClr val="E8E0D4"/>
-              </a:solidFill>
-            </a:ln>
-          </p:spPr>
-          <p:txBody>
-            <a:bodyPr/>
-            <a:lstStyle/>
-            <a:p>
-              <a:endParaRPr lang="zh-CN" altLang="en-US"/>
+              <a:endParaRPr lang="zh-CN" altLang="en-US" dirty="0"/>
             </a:p>
           </p:txBody>
         </p:sp>
@@ -22221,7 +22921,7 @@
           </p:nvSpPr>
           <p:spPr>
             <a:xfrm>
-              <a:off x="6365558" y="4862989"/>
+              <a:off x="6380750" y="6398895"/>
               <a:ext cx="4452938" cy="259080"/>
             </a:xfrm>
             <a:prstGeom prst="rect">
@@ -22349,18 +23049,78 @@
           </p:txBody>
         </p:sp>
       </p:grpSp>
+      <p:pic>
+        <p:nvPicPr>
+          <p:cNvPr id="26" name="图片 25">
+            <a:extLst>
+              <a:ext uri="{FF2B5EF4-FFF2-40B4-BE49-F238E27FC236}">
+                <a16:creationId xmlns:a16="http://schemas.microsoft.com/office/drawing/2014/main" id="{11D90F11-9964-2B1B-2D40-FF5BBEEDEC72}"/>
+              </a:ext>
+            </a:extLst>
+          </p:cNvPr>
+          <p:cNvPicPr>
+            <a:picLocks noChangeAspect="1"/>
+          </p:cNvPicPr>
+          <p:nvPr/>
+        </p:nvPicPr>
+        <p:blipFill>
+          <a:blip r:embed="rId4"/>
+          <a:stretch>
+            <a:fillRect/>
+          </a:stretch>
+        </p:blipFill>
+        <p:spPr>
+          <a:xfrm>
+            <a:off x="6000750" y="619125"/>
+            <a:ext cx="5738985" cy="2046134"/>
+          </a:xfrm>
+          <a:prstGeom prst="rect">
+            <a:avLst/>
+          </a:prstGeom>
+        </p:spPr>
+      </p:pic>
+      <p:pic>
+        <p:nvPicPr>
+          <p:cNvPr id="28" name="图片 27">
+            <a:extLst>
+              <a:ext uri="{FF2B5EF4-FFF2-40B4-BE49-F238E27FC236}">
+                <a16:creationId xmlns:a16="http://schemas.microsoft.com/office/drawing/2014/main" id="{B0F3D94B-73B4-AB6D-A694-2676BCBA56BA}"/>
+              </a:ext>
+            </a:extLst>
+          </p:cNvPr>
+          <p:cNvPicPr>
+            <a:picLocks noChangeAspect="1"/>
+          </p:cNvPicPr>
+          <p:nvPr/>
+        </p:nvPicPr>
+        <p:blipFill>
+          <a:blip r:embed="rId5"/>
+          <a:stretch>
+            <a:fillRect/>
+          </a:stretch>
+        </p:blipFill>
+        <p:spPr>
+          <a:xfrm>
+            <a:off x="6063342" y="2704521"/>
+            <a:ext cx="5738985" cy="2057108"/>
+          </a:xfrm>
+          <a:prstGeom prst="rect">
+            <a:avLst/>
+          </a:prstGeom>
+        </p:spPr>
+      </p:pic>
     </p:spTree>
   </p:cSld>
   <p:clrMapOvr>
     <a:masterClrMapping/>
   </p:clrMapOvr>
-  <mc:AlternateContent xmlns:mc="http://schemas.openxmlformats.org/markup-compatibility/2006">
-    <mc:Choice xmlns:p14="http://schemas.microsoft.com/office/powerpoint/2010/main" Requires="p14">
+  <mc:AlternateContent xmlns:mc="http://schemas.openxmlformats.org/markup-compatibility/2006" xmlns:p14="http://schemas.microsoft.com/office/powerpoint/2010/main">
+    <mc:Choice Requires="p14">
       <p:transition p14:dur="400">
         <p:fade/>
       </p:transition>
     </mc:Choice>
-    <mc:Fallback>
+    <mc:Fallback xmlns:a16="http://schemas.microsoft.com/office/drawing/2014/main" xmlns="">
       <p:transition>
         <p:fade/>
       </p:transition>
@@ -22724,9 +23484,9 @@
         <p:grpSpPr>
           <a:xfrm>
             <a:off x="571500" y="1714500"/>
-            <a:ext cx="11577117" cy="4000500"/>
+            <a:ext cx="11313059" cy="4000500"/>
             <a:chOff x="571500" y="1714500"/>
-            <a:chExt cx="11577117" cy="4000500"/>
+            <a:chExt cx="11313059" cy="4000500"/>
           </a:xfrm>
         </p:grpSpPr>
         <p:sp>
@@ -22807,7 +23567,7 @@
           </p:blipFill>
           <p:spPr>
             <a:xfrm>
-              <a:off x="6428514" y="1984375"/>
+              <a:off x="6164456" y="2010728"/>
               <a:ext cx="5720103" cy="3619500"/>
             </a:xfrm>
             <a:prstGeom prst="rect">
@@ -22856,7 +23616,7 @@
         <p:spPr>
           <a:xfrm>
             <a:off x="742950" y="6010275"/>
-            <a:ext cx="6328386" cy="304800"/>
+            <a:ext cx="6306214" cy="230832"/>
           </a:xfrm>
           <a:prstGeom prst="rect">
             <a:avLst/>
@@ -22882,8 +23642,49 @@
                 <a:ea typeface="Microsoft YaHei"/>
                 <a:cs typeface="Arial"/>
               </a:rPr>
-              <a:t>前 5 个主成分累计解释方差达 98.35%，足以保留绝大部分光谱信息</a:t>
+              <a:t>前 5 个主成分累计解释方差</a:t>
             </a:r>
+            <a:r>
+              <a:rPr lang="zh-CN" altLang="en-US" sz="1500" b="1" dirty="0">
+                <a:solidFill>
+                  <a:srgbClr val="D4940A"/>
+                </a:solidFill>
+                <a:latin typeface="Arial"/>
+                <a:ea typeface="Microsoft YaHei"/>
+                <a:cs typeface="Arial"/>
+              </a:rPr>
+              <a:t>已经</a:t>
+            </a:r>
+            <a:r>
+              <a:rPr lang="zh-CN" sz="1500" b="1" dirty="0">
+                <a:solidFill>
+                  <a:srgbClr val="D4940A"/>
+                </a:solidFill>
+                <a:latin typeface="Arial"/>
+                <a:ea typeface="Microsoft YaHei"/>
+                <a:cs typeface="Arial"/>
+              </a:rPr>
+              <a:t>达 98.35%，足以保留绝大部分光谱信息</a:t>
+            </a:r>
+            <a:r>
+              <a:rPr lang="zh-CN" altLang="en-US" sz="1500" b="1" dirty="0">
+                <a:solidFill>
+                  <a:srgbClr val="D4940A"/>
+                </a:solidFill>
+                <a:latin typeface="Arial"/>
+                <a:ea typeface="Microsoft YaHei"/>
+                <a:cs typeface="Arial"/>
+              </a:rPr>
+              <a:t>！</a:t>
+            </a:r>
+            <a:endParaRPr lang="zh-CN" sz="1500" b="1" dirty="0">
+              <a:solidFill>
+                <a:srgbClr val="D4940A"/>
+              </a:solidFill>
+              <a:latin typeface="Arial"/>
+              <a:ea typeface="Microsoft YaHei"/>
+              <a:cs typeface="Arial"/>
+            </a:endParaRPr>
           </a:p>
         </p:txBody>
       </p:sp>
@@ -23017,13 +23818,13 @@
   <p:clrMapOvr>
     <a:masterClrMapping/>
   </p:clrMapOvr>
-  <mc:AlternateContent xmlns:mc="http://schemas.openxmlformats.org/markup-compatibility/2006">
-    <mc:Choice xmlns:p14="http://schemas.microsoft.com/office/powerpoint/2010/main" Requires="p14">
+  <mc:AlternateContent xmlns:mc="http://schemas.openxmlformats.org/markup-compatibility/2006" xmlns:p14="http://schemas.microsoft.com/office/powerpoint/2010/main">
+    <mc:Choice Requires="p14">
       <p:transition p14:dur="400">
         <p:fade/>
       </p:transition>
     </mc:Choice>
-    <mc:Fallback>
+    <mc:Fallback xmlns:a16="http://schemas.microsoft.com/office/drawing/2014/main" xmlns="">
       <p:transition>
         <p:fade/>
       </p:transition>
@@ -24881,13 +25682,13 @@
   <p:clrMapOvr>
     <a:masterClrMapping/>
   </p:clrMapOvr>
-  <mc:AlternateContent xmlns:mc="http://schemas.openxmlformats.org/markup-compatibility/2006">
-    <mc:Choice xmlns:p14="http://schemas.microsoft.com/office/powerpoint/2010/main" Requires="p14">
+  <mc:AlternateContent xmlns:mc="http://schemas.openxmlformats.org/markup-compatibility/2006" xmlns:p14="http://schemas.microsoft.com/office/powerpoint/2010/main">
+    <mc:Choice Requires="p14">
       <p:transition p14:dur="400">
         <p:fade/>
       </p:transition>
     </mc:Choice>
-    <mc:Fallback>
+    <mc:Fallback xmlns="">
       <p:transition>
         <p:fade/>
       </p:transition>
@@ -25085,9 +25886,9 @@
         <p:grpSpPr>
           <a:xfrm>
             <a:off x="535305" y="379095"/>
-            <a:ext cx="6457188" cy="921067"/>
+            <a:ext cx="5116785" cy="780529"/>
             <a:chOff x="535305" y="379095"/>
-            <a:chExt cx="6457188" cy="921067"/>
+            <a:chExt cx="5116785" cy="780529"/>
           </a:xfrm>
         </p:grpSpPr>
         <p:sp>
@@ -25170,7 +25971,7 @@
           <p:spPr>
             <a:xfrm>
               <a:off x="535305" y="721042"/>
-              <a:ext cx="6457188" cy="579120"/>
+              <a:ext cx="5116785" cy="438582"/>
             </a:xfrm>
             <a:prstGeom prst="rect">
               <a:avLst/>
@@ -25196,7 +25997,7 @@
                   <a:ea typeface="Microsoft YaHei"/>
                   <a:cs typeface="Arial"/>
                 </a:rPr>
-                <a:t>尝试多种课内模型，用结果选择方案</a:t>
+                <a:t>尝试多种模型，用结果选择方案</a:t>
               </a:r>
             </a:p>
           </p:txBody>
@@ -25211,7 +26012,7 @@
         <p:spPr>
           <a:xfrm>
             <a:off x="552450" y="1266825"/>
-            <a:ext cx="4838700" cy="304800"/>
+            <a:ext cx="5071901" cy="230832"/>
           </a:xfrm>
           <a:prstGeom prst="rect">
             <a:avLst/>
@@ -25237,7 +26038,29 @@
                 <a:ea typeface="Microsoft YaHei"/>
                 <a:cs typeface="Arial"/>
               </a:rPr>
-              <a:t>把光谱估计作为回归问题，尝试课程中涉及的模型路线</a:t>
+              <a:t>把光谱估计作为回归问题，尝试课程中涉及的</a:t>
+            </a:r>
+            <a:r>
+              <a:rPr lang="zh-CN" altLang="en-US" sz="1500" dirty="0">
+                <a:solidFill>
+                  <a:srgbClr val="8C8578"/>
+                </a:solidFill>
+                <a:latin typeface="Arial"/>
+                <a:ea typeface="Microsoft YaHei"/>
+                <a:cs typeface="Arial"/>
+              </a:rPr>
+              <a:t>多种</a:t>
+            </a:r>
+            <a:r>
+              <a:rPr lang="zh-CN" sz="1500" dirty="0">
+                <a:solidFill>
+                  <a:srgbClr val="8C8578"/>
+                </a:solidFill>
+                <a:latin typeface="Arial"/>
+                <a:ea typeface="Microsoft YaHei"/>
+                <a:cs typeface="Arial"/>
+              </a:rPr>
+              <a:t>模型路线</a:t>
             </a:r>
           </a:p>
         </p:txBody>
@@ -25250,10 +26073,10 @@
         </p:nvGrpSpPr>
         <p:grpSpPr>
           <a:xfrm>
-            <a:off x="571500" y="1121291"/>
-            <a:ext cx="11239500" cy="3260209"/>
-            <a:chOff x="571500" y="1121291"/>
-            <a:chExt cx="11239500" cy="3260209"/>
+            <a:off x="571500" y="1714500"/>
+            <a:ext cx="11239500" cy="2667000"/>
+            <a:chOff x="571500" y="1714500"/>
+            <a:chExt cx="11239500" cy="2667000"/>
           </a:xfrm>
         </p:grpSpPr>
         <p:sp>
@@ -26161,36 +26984,6 @@
             </a:p>
           </p:txBody>
         </p:sp>
-        <p:pic>
-          <p:nvPicPr>
-            <p:cNvPr id="32" name="Image 32"/>
-            <p:cNvPicPr>
-              <a:picLocks noChangeAspect="1"/>
-            </p:cNvPicPr>
-            <p:nvPr/>
-          </p:nvPicPr>
-          <p:blipFill>
-            <a:blip>
-              <a:extLst>
-                <a:ext uri="{96DAC541-7B7A-43D3-8B79-37D633B846F1}">
-                  <asvg:svgBlip xmlns:asvg="http://schemas.microsoft.com/office/drawing/2016/SVG/main" r:embed="rId3"/>
-                </a:ext>
-              </a:extLst>
-            </a:blip>
-            <a:stretch>
-              <a:fillRect/>
-            </a:stretch>
-          </p:blipFill>
-          <p:spPr>
-            <a:xfrm rot="20107444">
-              <a:off x="7048898" y="1121291"/>
-              <a:ext cx="1071287" cy="1071287"/>
-            </a:xfrm>
-            <a:prstGeom prst="rect">
-              <a:avLst/>
-            </a:prstGeom>
-          </p:spPr>
-        </p:pic>
         <p:sp>
           <p:nvSpPr>
             <p:cNvPr id="33" name="TextBox 33"/>
@@ -26990,7 +27783,7 @@
           <a:blip>
             <a:extLst>
               <a:ext uri="{96DAC541-7B7A-43D3-8B79-37D633B846F1}">
-                <asvg:svgBlip xmlns:asvg="http://schemas.microsoft.com/office/drawing/2016/SVG/main" r:embed="rId4"/>
+                <asvg:svgBlip xmlns:asvg="http://schemas.microsoft.com/office/drawing/2016/SVG/main" r:embed="rId3"/>
               </a:ext>
             </a:extLst>
           </a:blip>
@@ -27008,18 +27801,54 @@
           </a:prstGeom>
         </p:spPr>
       </p:pic>
+      <p:pic>
+        <p:nvPicPr>
+          <p:cNvPr id="56" name="Image 32">
+            <a:extLst>
+              <a:ext uri="{FF2B5EF4-FFF2-40B4-BE49-F238E27FC236}">
+                <a16:creationId xmlns:a16="http://schemas.microsoft.com/office/drawing/2014/main" id="{4E5E085F-29EB-B595-F09D-F81BB187D2AD}"/>
+              </a:ext>
+            </a:extLst>
+          </p:cNvPr>
+          <p:cNvPicPr>
+            <a:picLocks noChangeAspect="1"/>
+          </p:cNvPicPr>
+          <p:nvPr/>
+        </p:nvPicPr>
+        <p:blipFill>
+          <a:blip>
+            <a:extLst>
+              <a:ext uri="{96DAC541-7B7A-43D3-8B79-37D633B846F1}">
+                <asvg:svgBlip xmlns:asvg="http://schemas.microsoft.com/office/drawing/2016/SVG/main" r:embed="rId4"/>
+              </a:ext>
+            </a:extLst>
+          </a:blip>
+          <a:stretch>
+            <a:fillRect/>
+          </a:stretch>
+        </p:blipFill>
+        <p:spPr>
+          <a:xfrm rot="20107444">
+            <a:off x="7036356" y="1112896"/>
+            <a:ext cx="1071287" cy="1071287"/>
+          </a:xfrm>
+          <a:prstGeom prst="rect">
+            <a:avLst/>
+          </a:prstGeom>
+        </p:spPr>
+      </p:pic>
     </p:spTree>
   </p:cSld>
   <p:clrMapOvr>
     <a:masterClrMapping/>
   </p:clrMapOvr>
-  <mc:AlternateContent xmlns:mc="http://schemas.openxmlformats.org/markup-compatibility/2006">
-    <mc:Choice xmlns:p14="http://schemas.microsoft.com/office/powerpoint/2010/main" Requires="p14">
+  <mc:AlternateContent xmlns:mc="http://schemas.openxmlformats.org/markup-compatibility/2006" xmlns:p14="http://schemas.microsoft.com/office/powerpoint/2010/main">
+    <mc:Choice Requires="p14">
       <p:transition p14:dur="400">
         <p:fade/>
       </p:transition>
     </mc:Choice>
-    <mc:Fallback>
+    <mc:Fallback xmlns:asvg="http://schemas.microsoft.com/office/drawing/2016/SVG/main" xmlns:a16="http://schemas.microsoft.com/office/drawing/2014/main" xmlns="">
       <p:transition>
         <p:fade/>
       </p:transition>
@@ -27037,9 +27866,6 @@
                     <p:cTn id="3" fill="hold">
                       <p:stCondLst>
                         <p:cond delay="indefinite"/>
-                        <p:cond evt="onBegin" delay="0">
-                          <p:tn val="2"/>
-                        </p:cond>
                       </p:stCondLst>
                       <p:childTnLst>
                         <p:par>
@@ -27049,7 +27875,7 @@
                             </p:stCondLst>
                             <p:childTnLst>
                               <p:par>
-                                <p:cTn id="5" presetID="23" presetClass="entr" presetSubtype="0" fill="hold" nodeType="afterEffect">
+                                <p:cTn id="5" presetID="30" presetClass="entr" presetSubtype="0" fill="hold" nodeType="clickEffect">
                                   <p:stCondLst>
                                     <p:cond delay="0"/>
                                   </p:stCondLst>
@@ -27062,7 +27888,7 @@
                                           </p:stCondLst>
                                         </p:cTn>
                                         <p:tgtEl>
-                                          <p:spTgt spid="47"/>
+                                          <p:spTgt spid="56"/>
                                         </p:tgtEl>
                                         <p:attrNameLst>
                                           <p:attrName>style.visibility</p:attrName>
@@ -27072,14 +27898,313 @@
                                         <p:strVal val="visible"/>
                                       </p:to>
                                     </p:set>
-                                    <p:animEffect transition="in" filter="image">
+                                    <p:animEffect transition="in" filter="fade">
                                       <p:cBhvr>
-                                        <p:cTn id="7" dur="400"/>
+                                        <p:cTn id="7" dur="800" decel="100000"/>
                                         <p:tgtEl>
-                                          <p:spTgt spid="47"/>
+                                          <p:spTgt spid="56"/>
                                         </p:tgtEl>
                                       </p:cBhvr>
                                     </p:animEffect>
+                                    <p:anim calcmode="lin" valueType="num">
+                                      <p:cBhvr>
+                                        <p:cTn id="8" dur="800" decel="100000" fill="hold"/>
+                                        <p:tgtEl>
+                                          <p:spTgt spid="56"/>
+                                        </p:tgtEl>
+                                        <p:attrNameLst>
+                                          <p:attrName>style.rotation</p:attrName>
+                                        </p:attrNameLst>
+                                      </p:cBhvr>
+                                      <p:tavLst>
+                                        <p:tav tm="0">
+                                          <p:val>
+                                            <p:fltVal val="-90"/>
+                                          </p:val>
+                                        </p:tav>
+                                        <p:tav tm="100000">
+                                          <p:val>
+                                            <p:fltVal val="0"/>
+                                          </p:val>
+                                        </p:tav>
+                                      </p:tavLst>
+                                    </p:anim>
+                                    <p:anim calcmode="lin" valueType="num">
+                                      <p:cBhvr>
+                                        <p:cTn id="9" dur="800" decel="100000" fill="hold"/>
+                                        <p:tgtEl>
+                                          <p:spTgt spid="56"/>
+                                        </p:tgtEl>
+                                        <p:attrNameLst>
+                                          <p:attrName>ppt_x</p:attrName>
+                                        </p:attrNameLst>
+                                      </p:cBhvr>
+                                      <p:tavLst>
+                                        <p:tav tm="0">
+                                          <p:val>
+                                            <p:strVal val="#ppt_x+0.4"/>
+                                          </p:val>
+                                        </p:tav>
+                                        <p:tav tm="100000">
+                                          <p:val>
+                                            <p:strVal val="#ppt_x-0.05"/>
+                                          </p:val>
+                                        </p:tav>
+                                      </p:tavLst>
+                                    </p:anim>
+                                    <p:anim calcmode="lin" valueType="num">
+                                      <p:cBhvr>
+                                        <p:cTn id="10" dur="800" decel="100000" fill="hold"/>
+                                        <p:tgtEl>
+                                          <p:spTgt spid="56"/>
+                                        </p:tgtEl>
+                                        <p:attrNameLst>
+                                          <p:attrName>ppt_y</p:attrName>
+                                        </p:attrNameLst>
+                                      </p:cBhvr>
+                                      <p:tavLst>
+                                        <p:tav tm="0">
+                                          <p:val>
+                                            <p:strVal val="#ppt_y-0.4"/>
+                                          </p:val>
+                                        </p:tav>
+                                        <p:tav tm="100000">
+                                          <p:val>
+                                            <p:strVal val="#ppt_y+0.1"/>
+                                          </p:val>
+                                        </p:tav>
+                                      </p:tavLst>
+                                    </p:anim>
+                                    <p:anim calcmode="lin" valueType="num">
+                                      <p:cBhvr>
+                                        <p:cTn id="11" dur="200" accel="100000" fill="hold">
+                                          <p:stCondLst>
+                                            <p:cond delay="800"/>
+                                          </p:stCondLst>
+                                        </p:cTn>
+                                        <p:tgtEl>
+                                          <p:spTgt spid="56"/>
+                                        </p:tgtEl>
+                                        <p:attrNameLst>
+                                          <p:attrName>ppt_x</p:attrName>
+                                        </p:attrNameLst>
+                                      </p:cBhvr>
+                                      <p:tavLst>
+                                        <p:tav tm="0">
+                                          <p:val>
+                                            <p:strVal val="#ppt_x-0.05"/>
+                                          </p:val>
+                                        </p:tav>
+                                        <p:tav tm="100000">
+                                          <p:val>
+                                            <p:strVal val="#ppt_x"/>
+                                          </p:val>
+                                        </p:tav>
+                                      </p:tavLst>
+                                    </p:anim>
+                                    <p:anim calcmode="lin" valueType="num">
+                                      <p:cBhvr>
+                                        <p:cTn id="12" dur="200" accel="100000" fill="hold">
+                                          <p:stCondLst>
+                                            <p:cond delay="800"/>
+                                          </p:stCondLst>
+                                        </p:cTn>
+                                        <p:tgtEl>
+                                          <p:spTgt spid="56"/>
+                                        </p:tgtEl>
+                                        <p:attrNameLst>
+                                          <p:attrName>ppt_y</p:attrName>
+                                        </p:attrNameLst>
+                                      </p:cBhvr>
+                                      <p:tavLst>
+                                        <p:tav tm="0">
+                                          <p:val>
+                                            <p:strVal val="#ppt_y+0.1"/>
+                                          </p:val>
+                                        </p:tav>
+                                        <p:tav tm="100000">
+                                          <p:val>
+                                            <p:strVal val="#ppt_y"/>
+                                          </p:val>
+                                        </p:tav>
+                                      </p:tavLst>
+                                    </p:anim>
+                                  </p:childTnLst>
+                                </p:cTn>
+                              </p:par>
+                            </p:childTnLst>
+                          </p:cTn>
+                        </p:par>
+                      </p:childTnLst>
+                    </p:cTn>
+                  </p:par>
+                  <p:par>
+                    <p:cTn id="13" fill="hold">
+                      <p:stCondLst>
+                        <p:cond delay="indefinite"/>
+                      </p:stCondLst>
+                      <p:childTnLst>
+                        <p:par>
+                          <p:cTn id="14" fill="hold">
+                            <p:stCondLst>
+                              <p:cond delay="0"/>
+                            </p:stCondLst>
+                            <p:childTnLst>
+                              <p:par>
+                                <p:cTn id="15" presetID="30" presetClass="entr" presetSubtype="0" fill="hold" nodeType="clickEffect">
+                                  <p:stCondLst>
+                                    <p:cond delay="0"/>
+                                  </p:stCondLst>
+                                  <p:childTnLst>
+                                    <p:set>
+                                      <p:cBhvr>
+                                        <p:cTn id="16" dur="1" fill="hold">
+                                          <p:stCondLst>
+                                            <p:cond delay="0"/>
+                                          </p:stCondLst>
+                                        </p:cTn>
+                                        <p:tgtEl>
+                                          <p:spTgt spid="55"/>
+                                        </p:tgtEl>
+                                        <p:attrNameLst>
+                                          <p:attrName>style.visibility</p:attrName>
+                                        </p:attrNameLst>
+                                      </p:cBhvr>
+                                      <p:to>
+                                        <p:strVal val="visible"/>
+                                      </p:to>
+                                    </p:set>
+                                    <p:animEffect transition="in" filter="fade">
+                                      <p:cBhvr>
+                                        <p:cTn id="17" dur="800" decel="100000"/>
+                                        <p:tgtEl>
+                                          <p:spTgt spid="55"/>
+                                        </p:tgtEl>
+                                      </p:cBhvr>
+                                    </p:animEffect>
+                                    <p:anim calcmode="lin" valueType="num">
+                                      <p:cBhvr>
+                                        <p:cTn id="18" dur="800" decel="100000" fill="hold"/>
+                                        <p:tgtEl>
+                                          <p:spTgt spid="55"/>
+                                        </p:tgtEl>
+                                        <p:attrNameLst>
+                                          <p:attrName>style.rotation</p:attrName>
+                                        </p:attrNameLst>
+                                      </p:cBhvr>
+                                      <p:tavLst>
+                                        <p:tav tm="0">
+                                          <p:val>
+                                            <p:fltVal val="-90"/>
+                                          </p:val>
+                                        </p:tav>
+                                        <p:tav tm="100000">
+                                          <p:val>
+                                            <p:fltVal val="0"/>
+                                          </p:val>
+                                        </p:tav>
+                                      </p:tavLst>
+                                    </p:anim>
+                                    <p:anim calcmode="lin" valueType="num">
+                                      <p:cBhvr>
+                                        <p:cTn id="19" dur="800" decel="100000" fill="hold"/>
+                                        <p:tgtEl>
+                                          <p:spTgt spid="55"/>
+                                        </p:tgtEl>
+                                        <p:attrNameLst>
+                                          <p:attrName>ppt_x</p:attrName>
+                                        </p:attrNameLst>
+                                      </p:cBhvr>
+                                      <p:tavLst>
+                                        <p:tav tm="0">
+                                          <p:val>
+                                            <p:strVal val="#ppt_x+0.4"/>
+                                          </p:val>
+                                        </p:tav>
+                                        <p:tav tm="100000">
+                                          <p:val>
+                                            <p:strVal val="#ppt_x-0.05"/>
+                                          </p:val>
+                                        </p:tav>
+                                      </p:tavLst>
+                                    </p:anim>
+                                    <p:anim calcmode="lin" valueType="num">
+                                      <p:cBhvr>
+                                        <p:cTn id="20" dur="800" decel="100000" fill="hold"/>
+                                        <p:tgtEl>
+                                          <p:spTgt spid="55"/>
+                                        </p:tgtEl>
+                                        <p:attrNameLst>
+                                          <p:attrName>ppt_y</p:attrName>
+                                        </p:attrNameLst>
+                                      </p:cBhvr>
+                                      <p:tavLst>
+                                        <p:tav tm="0">
+                                          <p:val>
+                                            <p:strVal val="#ppt_y-0.4"/>
+                                          </p:val>
+                                        </p:tav>
+                                        <p:tav tm="100000">
+                                          <p:val>
+                                            <p:strVal val="#ppt_y+0.1"/>
+                                          </p:val>
+                                        </p:tav>
+                                      </p:tavLst>
+                                    </p:anim>
+                                    <p:anim calcmode="lin" valueType="num">
+                                      <p:cBhvr>
+                                        <p:cTn id="21" dur="200" accel="100000" fill="hold">
+                                          <p:stCondLst>
+                                            <p:cond delay="800"/>
+                                          </p:stCondLst>
+                                        </p:cTn>
+                                        <p:tgtEl>
+                                          <p:spTgt spid="55"/>
+                                        </p:tgtEl>
+                                        <p:attrNameLst>
+                                          <p:attrName>ppt_x</p:attrName>
+                                        </p:attrNameLst>
+                                      </p:cBhvr>
+                                      <p:tavLst>
+                                        <p:tav tm="0">
+                                          <p:val>
+                                            <p:strVal val="#ppt_x-0.05"/>
+                                          </p:val>
+                                        </p:tav>
+                                        <p:tav tm="100000">
+                                          <p:val>
+                                            <p:strVal val="#ppt_x"/>
+                                          </p:val>
+                                        </p:tav>
+                                      </p:tavLst>
+                                    </p:anim>
+                                    <p:anim calcmode="lin" valueType="num">
+                                      <p:cBhvr>
+                                        <p:cTn id="22" dur="200" accel="100000" fill="hold">
+                                          <p:stCondLst>
+                                            <p:cond delay="800"/>
+                                          </p:stCondLst>
+                                        </p:cTn>
+                                        <p:tgtEl>
+                                          <p:spTgt spid="55"/>
+                                        </p:tgtEl>
+                                        <p:attrNameLst>
+                                          <p:attrName>ppt_y</p:attrName>
+                                        </p:attrNameLst>
+                                      </p:cBhvr>
+                                      <p:tavLst>
+                                        <p:tav tm="0">
+                                          <p:val>
+                                            <p:strVal val="#ppt_y+0.1"/>
+                                          </p:val>
+                                        </p:tav>
+                                        <p:tav tm="100000">
+                                          <p:val>
+                                            <p:strVal val="#ppt_y"/>
+                                          </p:val>
+                                        </p:tav>
+                                      </p:tavLst>
+                                    </p:anim>
                                   </p:childTnLst>
                                 </p:cTn>
                               </p:par>

--- a/python 课设_答辩 PPT/python_course_defense_20260615_171117.pptx
+++ b/python 课设_答辩 PPT/python_course_defense_20260615_171117.pptx
@@ -1329,7 +1329,7 @@
           <a:p>
             <a:fld id="{5BCAD085-E8A6-8845-BD4E-CB4CCA059FC4}" type="datetimeFigureOut">
               <a:rPr lang="en-US" smtClean="0"/>
-              <a:t>6/15/26</a:t>
+              <a:t>6/16/26</a:t>
             </a:fld>
             <a:endParaRPr lang="en-US"/>
           </a:p>
@@ -1497,7 +1497,7 @@
           <a:p>
             <a:fld id="{5BCAD085-E8A6-8845-BD4E-CB4CCA059FC4}" type="datetimeFigureOut">
               <a:rPr lang="en-US" smtClean="0"/>
-              <a:t>6/15/26</a:t>
+              <a:t>6/16/26</a:t>
             </a:fld>
             <a:endParaRPr lang="en-US"/>
           </a:p>
@@ -1675,7 +1675,7 @@
           <a:p>
             <a:fld id="{5BCAD085-E8A6-8845-BD4E-CB4CCA059FC4}" type="datetimeFigureOut">
               <a:rPr lang="en-US" smtClean="0"/>
-              <a:t>6/15/26</a:t>
+              <a:t>6/16/26</a:t>
             </a:fld>
             <a:endParaRPr lang="en-US"/>
           </a:p>
@@ -1843,7 +1843,7 @@
           <a:p>
             <a:fld id="{5BCAD085-E8A6-8845-BD4E-CB4CCA059FC4}" type="datetimeFigureOut">
               <a:rPr lang="en-US" smtClean="0"/>
-              <a:t>6/15/26</a:t>
+              <a:t>6/16/26</a:t>
             </a:fld>
             <a:endParaRPr lang="en-US"/>
           </a:p>
@@ -2088,7 +2088,7 @@
           <a:p>
             <a:fld id="{5BCAD085-E8A6-8845-BD4E-CB4CCA059FC4}" type="datetimeFigureOut">
               <a:rPr lang="en-US" smtClean="0"/>
-              <a:t>6/15/26</a:t>
+              <a:t>6/16/26</a:t>
             </a:fld>
             <a:endParaRPr lang="en-US"/>
           </a:p>
@@ -2373,7 +2373,7 @@
           <a:p>
             <a:fld id="{5BCAD085-E8A6-8845-BD4E-CB4CCA059FC4}" type="datetimeFigureOut">
               <a:rPr lang="en-US" smtClean="0"/>
-              <a:t>6/15/26</a:t>
+              <a:t>6/16/26</a:t>
             </a:fld>
             <a:endParaRPr lang="en-US"/>
           </a:p>
@@ -2792,7 +2792,7 @@
           <a:p>
             <a:fld id="{5BCAD085-E8A6-8845-BD4E-CB4CCA059FC4}" type="datetimeFigureOut">
               <a:rPr lang="en-US" smtClean="0"/>
-              <a:t>6/15/26</a:t>
+              <a:t>6/16/26</a:t>
             </a:fld>
             <a:endParaRPr lang="en-US"/>
           </a:p>
@@ -2909,7 +2909,7 @@
           <a:p>
             <a:fld id="{5BCAD085-E8A6-8845-BD4E-CB4CCA059FC4}" type="datetimeFigureOut">
               <a:rPr lang="en-US" smtClean="0"/>
-              <a:t>6/15/26</a:t>
+              <a:t>6/16/26</a:t>
             </a:fld>
             <a:endParaRPr lang="en-US"/>
           </a:p>
@@ -3004,7 +3004,7 @@
           <a:p>
             <a:fld id="{5BCAD085-E8A6-8845-BD4E-CB4CCA059FC4}" type="datetimeFigureOut">
               <a:rPr lang="en-US" smtClean="0"/>
-              <a:t>6/15/26</a:t>
+              <a:t>6/16/26</a:t>
             </a:fld>
             <a:endParaRPr lang="en-US"/>
           </a:p>
@@ -3279,7 +3279,7 @@
           <a:p>
             <a:fld id="{5BCAD085-E8A6-8845-BD4E-CB4CCA059FC4}" type="datetimeFigureOut">
               <a:rPr lang="en-US" smtClean="0"/>
-              <a:t>6/15/26</a:t>
+              <a:t>6/16/26</a:t>
             </a:fld>
             <a:endParaRPr lang="en-US"/>
           </a:p>
@@ -3531,7 +3531,7 @@
           <a:p>
             <a:fld id="{5BCAD085-E8A6-8845-BD4E-CB4CCA059FC4}" type="datetimeFigureOut">
               <a:rPr lang="en-US" smtClean="0"/>
-              <a:t>6/15/26</a:t>
+              <a:t>6/16/26</a:t>
             </a:fld>
             <a:endParaRPr lang="en-US"/>
           </a:p>
@@ -3742,7 +3742,7 @@
           <a:p>
             <a:fld id="{5BCAD085-E8A6-8845-BD4E-CB4CCA059FC4}" type="datetimeFigureOut">
               <a:rPr lang="en-US" smtClean="0"/>
-              <a:t>6/15/26</a:t>
+              <a:t>6/16/26</a:t>
             </a:fld>
             <a:endParaRPr lang="en-US"/>
           </a:p>
@@ -5040,7 +5040,7 @@
         <p:fade/>
       </p:transition>
     </mc:Choice>
-    <mc:Fallback xmlns:asvg="http://schemas.microsoft.com/office/drawing/2016/SVG/main" xmlns:a16="http://schemas.microsoft.com/office/drawing/2014/main" xmlns="">
+    <mc:Fallback xmlns="" xmlns:a16="http://schemas.microsoft.com/office/drawing/2014/main" xmlns:asvg="http://schemas.microsoft.com/office/drawing/2016/SVG/main">
       <p:transition>
         <p:fade/>
       </p:transition>
@@ -6876,8 +6876,8 @@
           </p:nvSpPr>
           <p:spPr>
             <a:xfrm>
-              <a:off x="9690830" y="2949892"/>
-              <a:ext cx="430340" cy="274320"/>
+              <a:off x="9716845" y="2949892"/>
+              <a:ext cx="378310" cy="207749"/>
             </a:xfrm>
             <a:prstGeom prst="rect">
               <a:avLst/>
@@ -6903,8 +6903,27 @@
                   <a:ea typeface="Microsoft YaHei"/>
                   <a:cs typeface="Consolas"/>
                 </a:rPr>
-                <a:t>0.00</a:t>
-              </a:r>
+                <a:t>0.0</a:t>
+              </a:r>
+              <a:r>
+                <a:rPr lang="en-US" altLang="zh-CN" sz="1350" dirty="0">
+                  <a:solidFill>
+                    <a:srgbClr val="2D2A26"/>
+                  </a:solidFill>
+                  <a:latin typeface="Consolas"/>
+                  <a:ea typeface="Microsoft YaHei"/>
+                  <a:cs typeface="Consolas"/>
+                </a:rPr>
+                <a:t>1</a:t>
+              </a:r>
+              <a:endParaRPr lang="zh-CN" sz="1350" dirty="0">
+                <a:solidFill>
+                  <a:srgbClr val="2D2A26"/>
+                </a:solidFill>
+                <a:latin typeface="Consolas"/>
+                <a:ea typeface="Microsoft YaHei"/>
+                <a:cs typeface="Consolas"/>
+              </a:endParaRPr>
             </a:p>
           </p:txBody>
         </p:sp>
@@ -9578,7 +9597,7 @@
           <p:spPr>
             <a:xfrm>
               <a:off x="936308" y="1910239"/>
-              <a:ext cx="1201706" cy="259080"/>
+              <a:ext cx="1615827" cy="196208"/>
             </a:xfrm>
             <a:prstGeom prst="rect">
               <a:avLst/>
@@ -9606,6 +9625,58 @@
                 </a:rPr>
                 <a:t>n_estimators</a:t>
               </a:r>
+              <a:r>
+                <a:rPr lang="zh-CN" altLang="en-US" sz="1275" b="1" dirty="0">
+                  <a:solidFill>
+                    <a:srgbClr val="C07040"/>
+                  </a:solidFill>
+                  <a:latin typeface="Consolas"/>
+                  <a:ea typeface="Microsoft YaHei"/>
+                  <a:cs typeface="Consolas"/>
+                </a:rPr>
+                <a:t> </a:t>
+              </a:r>
+              <a:r>
+                <a:rPr lang="en-US" altLang="zh-CN" sz="1275" b="1" dirty="0">
+                  <a:solidFill>
+                    <a:srgbClr val="C07040"/>
+                  </a:solidFill>
+                  <a:latin typeface="Consolas"/>
+                  <a:ea typeface="Microsoft YaHei"/>
+                  <a:cs typeface="Consolas"/>
+                </a:rPr>
+                <a:t>=</a:t>
+              </a:r>
+              <a:r>
+                <a:rPr lang="zh-CN" altLang="en-US" sz="1275" b="1" dirty="0">
+                  <a:solidFill>
+                    <a:srgbClr val="C07040"/>
+                  </a:solidFill>
+                  <a:latin typeface="Consolas"/>
+                  <a:ea typeface="Microsoft YaHei"/>
+                  <a:cs typeface="Consolas"/>
+                </a:rPr>
+                <a:t> </a:t>
+              </a:r>
+              <a:r>
+                <a:rPr lang="en-US" altLang="zh-CN" sz="1275" b="1" dirty="0">
+                  <a:solidFill>
+                    <a:srgbClr val="C07040"/>
+                  </a:solidFill>
+                  <a:latin typeface="Consolas"/>
+                  <a:ea typeface="Microsoft YaHei"/>
+                  <a:cs typeface="Consolas"/>
+                </a:rPr>
+                <a:t>100</a:t>
+              </a:r>
+              <a:endParaRPr lang="zh-CN" sz="1275" b="1" dirty="0">
+                <a:solidFill>
+                  <a:srgbClr val="C07040"/>
+                </a:solidFill>
+                <a:latin typeface="Consolas"/>
+                <a:ea typeface="Microsoft YaHei"/>
+                <a:cs typeface="Consolas"/>
+              </a:endParaRPr>
             </a:p>
           </p:txBody>
         </p:sp>
@@ -9691,7 +9762,7 @@
           <p:spPr>
             <a:xfrm>
               <a:off x="936308" y="2481739"/>
-              <a:ext cx="951775" cy="259080"/>
+              <a:ext cx="1256754" cy="196208"/>
             </a:xfrm>
             <a:prstGeom prst="rect">
               <a:avLst/>
@@ -9719,6 +9790,58 @@
                 </a:rPr>
                 <a:t>max_depth</a:t>
               </a:r>
+              <a:r>
+                <a:rPr lang="zh-CN" altLang="en-US" sz="1275" b="1" dirty="0">
+                  <a:solidFill>
+                    <a:srgbClr val="D4940A"/>
+                  </a:solidFill>
+                  <a:latin typeface="Consolas"/>
+                  <a:ea typeface="Microsoft YaHei"/>
+                  <a:cs typeface="Consolas"/>
+                </a:rPr>
+                <a:t> </a:t>
+              </a:r>
+              <a:r>
+                <a:rPr lang="en-US" altLang="zh-CN" sz="1275" b="1" dirty="0">
+                  <a:solidFill>
+                    <a:srgbClr val="D4940A"/>
+                  </a:solidFill>
+                  <a:latin typeface="Consolas"/>
+                  <a:ea typeface="Microsoft YaHei"/>
+                  <a:cs typeface="Consolas"/>
+                </a:rPr>
+                <a:t>=</a:t>
+              </a:r>
+              <a:r>
+                <a:rPr lang="zh-CN" altLang="en-US" sz="1275" b="1" dirty="0">
+                  <a:solidFill>
+                    <a:srgbClr val="D4940A"/>
+                  </a:solidFill>
+                  <a:latin typeface="Consolas"/>
+                  <a:ea typeface="Microsoft YaHei"/>
+                  <a:cs typeface="Consolas"/>
+                </a:rPr>
+                <a:t> </a:t>
+              </a:r>
+              <a:r>
+                <a:rPr lang="en-US" altLang="zh-CN" sz="1275" b="1" dirty="0">
+                  <a:solidFill>
+                    <a:srgbClr val="D4940A"/>
+                  </a:solidFill>
+                  <a:latin typeface="Consolas"/>
+                  <a:ea typeface="Microsoft YaHei"/>
+                  <a:cs typeface="Consolas"/>
+                </a:rPr>
+                <a:t>20</a:t>
+              </a:r>
+              <a:endParaRPr lang="zh-CN" sz="1275" b="1" dirty="0">
+                <a:solidFill>
+                  <a:srgbClr val="D4940A"/>
+                </a:solidFill>
+                <a:latin typeface="Consolas"/>
+                <a:ea typeface="Microsoft YaHei"/>
+                <a:cs typeface="Consolas"/>
+              </a:endParaRPr>
             </a:p>
           </p:txBody>
         </p:sp>
@@ -9804,7 +9927,7 @@
           <p:spPr>
             <a:xfrm>
               <a:off x="936308" y="3053239"/>
-              <a:ext cx="1594455" cy="259080"/>
+              <a:ext cx="1885131" cy="196208"/>
             </a:xfrm>
             <a:prstGeom prst="rect">
               <a:avLst/>
@@ -9832,6 +9955,58 @@
                 </a:rPr>
                 <a:t>min_samples_split</a:t>
               </a:r>
+              <a:r>
+                <a:rPr lang="zh-CN" altLang="en-US" sz="1275" b="1" dirty="0">
+                  <a:solidFill>
+                    <a:srgbClr val="8B6DB0"/>
+                  </a:solidFill>
+                  <a:latin typeface="Consolas"/>
+                  <a:ea typeface="Microsoft YaHei"/>
+                  <a:cs typeface="Consolas"/>
+                </a:rPr>
+                <a:t> </a:t>
+              </a:r>
+              <a:r>
+                <a:rPr lang="en-US" altLang="zh-CN" sz="1275" b="1" dirty="0">
+                  <a:solidFill>
+                    <a:srgbClr val="8B6DB0"/>
+                  </a:solidFill>
+                  <a:latin typeface="Consolas"/>
+                  <a:ea typeface="Microsoft YaHei"/>
+                  <a:cs typeface="Consolas"/>
+                </a:rPr>
+                <a:t>=</a:t>
+              </a:r>
+              <a:r>
+                <a:rPr lang="zh-CN" altLang="en-US" sz="1275" b="1" dirty="0">
+                  <a:solidFill>
+                    <a:srgbClr val="8B6DB0"/>
+                  </a:solidFill>
+                  <a:latin typeface="Consolas"/>
+                  <a:ea typeface="Microsoft YaHei"/>
+                  <a:cs typeface="Consolas"/>
+                </a:rPr>
+                <a:t> </a:t>
+              </a:r>
+              <a:r>
+                <a:rPr lang="en-US" altLang="zh-CN" sz="1275" b="1" dirty="0">
+                  <a:solidFill>
+                    <a:srgbClr val="8B6DB0"/>
+                  </a:solidFill>
+                  <a:latin typeface="Consolas"/>
+                  <a:ea typeface="Microsoft YaHei"/>
+                  <a:cs typeface="Consolas"/>
+                </a:rPr>
+                <a:t>5</a:t>
+              </a:r>
+              <a:endParaRPr lang="zh-CN" sz="1275" b="1" dirty="0">
+                <a:solidFill>
+                  <a:srgbClr val="8B6DB0"/>
+                </a:solidFill>
+                <a:latin typeface="Consolas"/>
+                <a:ea typeface="Microsoft YaHei"/>
+                <a:cs typeface="Consolas"/>
+              </a:endParaRPr>
             </a:p>
           </p:txBody>
         </p:sp>
@@ -9917,7 +10092,7 @@
           <p:spPr>
             <a:xfrm>
               <a:off x="936308" y="3624739"/>
-              <a:ext cx="1246337" cy="259080"/>
+              <a:ext cx="1526059" cy="196208"/>
             </a:xfrm>
             <a:prstGeom prst="rect">
               <a:avLst/>
@@ -9945,6 +10120,58 @@
                 </a:rPr>
                 <a:t>random_state</a:t>
               </a:r>
+              <a:r>
+                <a:rPr lang="zh-CN" altLang="en-US" sz="1275" b="1" dirty="0">
+                  <a:solidFill>
+                    <a:srgbClr val="3D8B5E"/>
+                  </a:solidFill>
+                  <a:latin typeface="Consolas"/>
+                  <a:ea typeface="Microsoft YaHei"/>
+                  <a:cs typeface="Consolas"/>
+                </a:rPr>
+                <a:t> </a:t>
+              </a:r>
+              <a:r>
+                <a:rPr lang="en-US" altLang="zh-CN" sz="1275" b="1" dirty="0">
+                  <a:solidFill>
+                    <a:srgbClr val="3D8B5E"/>
+                  </a:solidFill>
+                  <a:latin typeface="Consolas"/>
+                  <a:ea typeface="Microsoft YaHei"/>
+                  <a:cs typeface="Consolas"/>
+                </a:rPr>
+                <a:t>=</a:t>
+              </a:r>
+              <a:r>
+                <a:rPr lang="zh-CN" altLang="en-US" sz="1275" b="1" dirty="0">
+                  <a:solidFill>
+                    <a:srgbClr val="3D8B5E"/>
+                  </a:solidFill>
+                  <a:latin typeface="Consolas"/>
+                  <a:ea typeface="Microsoft YaHei"/>
+                  <a:cs typeface="Consolas"/>
+                </a:rPr>
+                <a:t> </a:t>
+              </a:r>
+              <a:r>
+                <a:rPr lang="en-US" altLang="zh-CN" sz="1275" b="1" dirty="0">
+                  <a:solidFill>
+                    <a:srgbClr val="3D8B5E"/>
+                  </a:solidFill>
+                  <a:latin typeface="Consolas"/>
+                  <a:ea typeface="Microsoft YaHei"/>
+                  <a:cs typeface="Consolas"/>
+                </a:rPr>
+                <a:t>42</a:t>
+              </a:r>
+              <a:endParaRPr lang="zh-CN" sz="1275" b="1" dirty="0">
+                <a:solidFill>
+                  <a:srgbClr val="3D8B5E"/>
+                </a:solidFill>
+                <a:latin typeface="Consolas"/>
+                <a:ea typeface="Microsoft YaHei"/>
+                <a:cs typeface="Consolas"/>
+              </a:endParaRPr>
             </a:p>
           </p:txBody>
         </p:sp>
@@ -9998,9 +10225,9 @@
         <p:grpSpPr>
           <a:xfrm>
             <a:off x="571500" y="4095750"/>
-            <a:ext cx="5334000" cy="1776412"/>
+            <a:ext cx="5334000" cy="1619250"/>
             <a:chOff x="571500" y="4095750"/>
-            <a:chExt cx="5334000" cy="1776412"/>
+            <a:chExt cx="5334000" cy="1714500"/>
           </a:xfrm>
         </p:grpSpPr>
         <p:sp>
@@ -10083,25 +10310,24 @@
           <p:spPr>
             <a:xfrm>
               <a:off x="748665" y="4553902"/>
-              <a:ext cx="3779139" cy="213360"/>
-            </a:xfrm>
-            <a:prstGeom prst="rect">
-              <a:avLst/>
-            </a:prstGeom>
-            <a:noFill/>
-            <a:ln>
-              <a:noFill/>
-            </a:ln>
-          </p:spPr>
-          <p:txBody>
-            <a:bodyPr wrap="none" lIns="0" tIns="0" rIns="0" bIns="0" anchor="t" anchorCtr="0">
+              <a:ext cx="4966335" cy="646331"/>
+            </a:xfrm>
+            <a:prstGeom prst="rect">
+              <a:avLst/>
+            </a:prstGeom>
+            <a:noFill/>
+            <a:ln>
+              <a:noFill/>
+            </a:ln>
+          </p:spPr>
+          <p:txBody>
+            <a:bodyPr wrap="square" lIns="0" tIns="0" rIns="0" bIns="0" anchor="t" anchorCtr="0">
               <a:spAutoFit/>
             </a:bodyPr>
             <a:lstStyle/>
             <a:p>
-              <a:pPr algn="l"/>
-              <a:r>
-                <a:rPr lang="zh-CN" sz="1050" dirty="0">
+              <a:r>
+                <a:rPr lang="en-US" altLang="zh-CN" sz="1050" dirty="0">
                   <a:solidFill>
                     <a:srgbClr val="E8E0D4"/>
                   </a:solidFill>
@@ -10109,39 +10335,10 @@
                   <a:ea typeface="Microsoft YaHei"/>
                   <a:cs typeface="Consolas"/>
                 </a:rPr>
-                <a:t>from sklearn.ensemble import RandomForestRegressor</a:t>
-              </a:r>
-            </a:p>
-          </p:txBody>
-        </p:sp>
-        <p:sp>
-          <p:nvSpPr>
-            <p:cNvPr id="26" name="TextBox 26"/>
-            <p:cNvSpPr txBox="1"/>
-            <p:nvPr/>
-          </p:nvSpPr>
-          <p:spPr>
-            <a:xfrm>
-              <a:off x="748665" y="4763452"/>
-              <a:ext cx="3492103" cy="213360"/>
-            </a:xfrm>
-            <a:prstGeom prst="rect">
-              <a:avLst/>
-            </a:prstGeom>
-            <a:noFill/>
-            <a:ln>
-              <a:noFill/>
-            </a:ln>
-          </p:spPr>
-          <p:txBody>
-            <a:bodyPr wrap="none" lIns="0" tIns="0" rIns="0" bIns="0" anchor="t" anchorCtr="0">
-              <a:spAutoFit/>
-            </a:bodyPr>
-            <a:lstStyle/>
-            <a:p>
-              <a:pPr algn="l"/>
-              <a:r>
-                <a:rPr lang="zh-CN" sz="1050" dirty="0">
+                <a:t>for name, model in </a:t>
+              </a:r>
+              <a:r>
+                <a:rPr lang="en-US" altLang="zh-CN" sz="1050" dirty="0" err="1">
                   <a:solidFill>
                     <a:srgbClr val="E8E0D4"/>
                   </a:solidFill>
@@ -10149,39 +10346,10 @@
                   <a:ea typeface="Microsoft YaHei"/>
                   <a:cs typeface="Consolas"/>
                 </a:rPr>
-                <a:t>from sklearn.model_selection import GridSearchCV</a:t>
-              </a:r>
-            </a:p>
-          </p:txBody>
-        </p:sp>
-        <p:sp>
-          <p:nvSpPr>
-            <p:cNvPr id="27" name="TextBox 27"/>
-            <p:cNvSpPr txBox="1"/>
-            <p:nvPr/>
-          </p:nvSpPr>
-          <p:spPr>
-            <a:xfrm>
-              <a:off x="748665" y="5030152"/>
-              <a:ext cx="1027795" cy="213360"/>
-            </a:xfrm>
-            <a:prstGeom prst="rect">
-              <a:avLst/>
-            </a:prstGeom>
-            <a:noFill/>
-            <a:ln>
-              <a:noFill/>
-            </a:ln>
-          </p:spPr>
-          <p:txBody>
-            <a:bodyPr wrap="none" lIns="0" tIns="0" rIns="0" bIns="0" anchor="t" anchorCtr="0">
-              <a:spAutoFit/>
-            </a:bodyPr>
-            <a:lstStyle/>
-            <a:p>
-              <a:pPr algn="l"/>
-              <a:r>
-                <a:rPr lang="zh-CN" sz="1050" dirty="0">
+                <a:t>build_models</a:t>
+              </a:r>
+              <a:r>
+                <a:rPr lang="en-US" altLang="zh-CN" sz="1050" dirty="0">
                   <a:solidFill>
                     <a:srgbClr val="E8E0D4"/>
                   </a:solidFill>
@@ -10189,39 +10357,10 @@
                   <a:ea typeface="Microsoft YaHei"/>
                   <a:cs typeface="Consolas"/>
                 </a:rPr>
-                <a:t>param_grid = {</a:t>
-              </a:r>
-            </a:p>
-          </p:txBody>
-        </p:sp>
-        <p:sp>
-          <p:nvSpPr>
-            <p:cNvPr id="28" name="TextBox 28"/>
-            <p:cNvSpPr txBox="1"/>
-            <p:nvPr/>
-          </p:nvSpPr>
-          <p:spPr>
-            <a:xfrm>
-              <a:off x="748665" y="5239702"/>
-              <a:ext cx="2378964" cy="213360"/>
-            </a:xfrm>
-            <a:prstGeom prst="rect">
-              <a:avLst/>
-            </a:prstGeom>
-            <a:noFill/>
-            <a:ln>
-              <a:noFill/>
-            </a:ln>
-          </p:spPr>
-          <p:txBody>
-            <a:bodyPr wrap="none" lIns="0" tIns="0" rIns="0" bIns="0" anchor="t" anchorCtr="0">
-              <a:spAutoFit/>
-            </a:bodyPr>
-            <a:lstStyle/>
-            <a:p>
-              <a:pPr algn="l"/>
-              <a:r>
-                <a:rPr lang="zh-CN" sz="1050" dirty="0">
+                <a:t>(</a:t>
+              </a:r>
+              <a:r>
+                <a:rPr lang="en-US" altLang="zh-CN" sz="1050" dirty="0" err="1">
                   <a:solidFill>
                     <a:srgbClr val="E8E0D4"/>
                   </a:solidFill>
@@ -10229,39 +10368,10 @@
                   <a:ea typeface="Microsoft YaHei"/>
                   <a:cs typeface="Consolas"/>
                 </a:rPr>
-                <a:t>'n_estimators': [100, 200, 300],</a:t>
-              </a:r>
-            </a:p>
-          </p:txBody>
-        </p:sp>
-        <p:sp>
-          <p:nvSpPr>
-            <p:cNvPr id="29" name="TextBox 29"/>
-            <p:cNvSpPr txBox="1"/>
-            <p:nvPr/>
-          </p:nvSpPr>
-          <p:spPr>
-            <a:xfrm>
-              <a:off x="748665" y="5449252"/>
-              <a:ext cx="2028920" cy="213360"/>
-            </a:xfrm>
-            <a:prstGeom prst="rect">
-              <a:avLst/>
-            </a:prstGeom>
-            <a:noFill/>
-            <a:ln>
-              <a:noFill/>
-            </a:ln>
-          </p:spPr>
-          <p:txBody>
-            <a:bodyPr wrap="none" lIns="0" tIns="0" rIns="0" bIns="0" anchor="t" anchorCtr="0">
-              <a:spAutoFit/>
-            </a:bodyPr>
-            <a:lstStyle/>
-            <a:p>
-              <a:pPr algn="l"/>
-              <a:r>
-                <a:rPr lang="zh-CN" sz="1050" dirty="0">
+                <a:t>random_state</a:t>
+              </a:r>
+              <a:r>
+                <a:rPr lang="en-US" altLang="zh-CN" sz="1050" dirty="0">
                   <a:solidFill>
                     <a:srgbClr val="E8E0D4"/>
                   </a:solidFill>
@@ -10269,39 +10379,10 @@
                   <a:ea typeface="Microsoft YaHei"/>
                   <a:cs typeface="Consolas"/>
                 </a:rPr>
-                <a:t>'max_depth': [10, 20, None]</a:t>
-              </a:r>
-            </a:p>
-          </p:txBody>
-        </p:sp>
-        <p:sp>
-          <p:nvSpPr>
-            <p:cNvPr id="30" name="TextBox 30"/>
-            <p:cNvSpPr txBox="1"/>
-            <p:nvPr/>
-          </p:nvSpPr>
-          <p:spPr>
-            <a:xfrm>
-              <a:off x="748665" y="5658802"/>
-              <a:ext cx="103680" cy="213360"/>
-            </a:xfrm>
-            <a:prstGeom prst="rect">
-              <a:avLst/>
-            </a:prstGeom>
-            <a:noFill/>
-            <a:ln>
-              <a:noFill/>
-            </a:ln>
-          </p:spPr>
-          <p:txBody>
-            <a:bodyPr wrap="none" lIns="0" tIns="0" rIns="0" bIns="0" anchor="t" anchorCtr="0">
-              <a:spAutoFit/>
-            </a:bodyPr>
-            <a:lstStyle/>
-            <a:p>
-              <a:pPr algn="l"/>
-              <a:r>
-                <a:rPr lang="zh-CN" sz="1050" dirty="0">
+                <a:t>=</a:t>
+              </a:r>
+              <a:r>
+                <a:rPr lang="en-US" altLang="zh-CN" sz="1050" dirty="0" err="1">
                   <a:solidFill>
                     <a:srgbClr val="E8E0D4"/>
                   </a:solidFill>
@@ -10309,8 +10390,176 @@
                   <a:ea typeface="Microsoft YaHei"/>
                   <a:cs typeface="Consolas"/>
                 </a:rPr>
-                <a:t>}</a:t>
-              </a:r>
+                <a:t>random_state</a:t>
+              </a:r>
+              <a:r>
+                <a:rPr lang="en-US" altLang="zh-CN" sz="1050" dirty="0">
+                  <a:solidFill>
+                    <a:srgbClr val="E8E0D4"/>
+                  </a:solidFill>
+                  <a:latin typeface="Consolas"/>
+                  <a:ea typeface="Microsoft YaHei"/>
+                  <a:cs typeface="Consolas"/>
+                </a:rPr>
+                <a:t>).items():   </a:t>
+              </a:r>
+            </a:p>
+            <a:p>
+              <a:r>
+                <a:rPr lang="en-US" altLang="zh-CN" sz="1050" dirty="0">
+                  <a:solidFill>
+                    <a:srgbClr val="E8E0D4"/>
+                  </a:solidFill>
+                  <a:latin typeface="Consolas"/>
+                  <a:ea typeface="Microsoft YaHei"/>
+                  <a:cs typeface="Consolas"/>
+                </a:rPr>
+                <a:t>      result = </a:t>
+              </a:r>
+              <a:r>
+                <a:rPr lang="en-US" altLang="zh-CN" sz="1050" dirty="0" err="1">
+                  <a:solidFill>
+                    <a:srgbClr val="E8E0D4"/>
+                  </a:solidFill>
+                  <a:latin typeface="Consolas"/>
+                  <a:ea typeface="Microsoft YaHei"/>
+                  <a:cs typeface="Consolas"/>
+                </a:rPr>
+                <a:t>train_single_model</a:t>
+              </a:r>
+              <a:r>
+                <a:rPr lang="en-US" altLang="zh-CN" sz="1050" dirty="0">
+                  <a:solidFill>
+                    <a:srgbClr val="E8E0D4"/>
+                  </a:solidFill>
+                  <a:latin typeface="Consolas"/>
+                  <a:ea typeface="Microsoft YaHei"/>
+                  <a:cs typeface="Consolas"/>
+                </a:rPr>
+                <a:t>(name, model, </a:t>
+              </a:r>
+            </a:p>
+            <a:p>
+              <a:r>
+                <a:rPr lang="en-US" altLang="zh-CN" sz="1050" dirty="0">
+                  <a:solidFill>
+                    <a:srgbClr val="E8E0D4"/>
+                  </a:solidFill>
+                  <a:latin typeface="Consolas"/>
+                  <a:ea typeface="Microsoft YaHei"/>
+                  <a:cs typeface="Consolas"/>
+                </a:rPr>
+                <a:t>				</a:t>
+              </a:r>
+              <a:r>
+                <a:rPr lang="en-US" altLang="zh-CN" sz="1050" dirty="0" err="1">
+                  <a:solidFill>
+                    <a:srgbClr val="E8E0D4"/>
+                  </a:solidFill>
+                  <a:latin typeface="Consolas"/>
+                  <a:ea typeface="Microsoft YaHei"/>
+                  <a:cs typeface="Consolas"/>
+                </a:rPr>
+                <a:t>x_train</a:t>
+              </a:r>
+              <a:r>
+                <a:rPr lang="en-US" altLang="zh-CN" sz="1050" dirty="0">
+                  <a:solidFill>
+                    <a:srgbClr val="E8E0D4"/>
+                  </a:solidFill>
+                  <a:latin typeface="Consolas"/>
+                  <a:ea typeface="Microsoft YaHei"/>
+                  <a:cs typeface="Consolas"/>
+                </a:rPr>
+                <a:t>, </a:t>
+              </a:r>
+              <a:r>
+                <a:rPr lang="en-US" altLang="zh-CN" sz="1050" dirty="0" err="1">
+                  <a:solidFill>
+                    <a:srgbClr val="E8E0D4"/>
+                  </a:solidFill>
+                  <a:latin typeface="Consolas"/>
+                  <a:ea typeface="Microsoft YaHei"/>
+                  <a:cs typeface="Consolas"/>
+                </a:rPr>
+                <a:t>y_train_pca</a:t>
+              </a:r>
+              <a:r>
+                <a:rPr lang="en-US" altLang="zh-CN" sz="1050" dirty="0">
+                  <a:solidFill>
+                    <a:srgbClr val="E8E0D4"/>
+                  </a:solidFill>
+                  <a:latin typeface="Consolas"/>
+                  <a:ea typeface="Microsoft YaHei"/>
+                  <a:cs typeface="Consolas"/>
+                </a:rPr>
+                <a:t>, </a:t>
+              </a:r>
+              <a:r>
+                <a:rPr lang="en-US" altLang="zh-CN" sz="1050" dirty="0" err="1">
+                  <a:solidFill>
+                    <a:srgbClr val="E8E0D4"/>
+                  </a:solidFill>
+                  <a:latin typeface="Consolas"/>
+                  <a:ea typeface="Microsoft YaHei"/>
+                  <a:cs typeface="Consolas"/>
+                </a:rPr>
+                <a:t>x_test</a:t>
+              </a:r>
+              <a:r>
+                <a:rPr lang="en-US" altLang="zh-CN" sz="1050" dirty="0">
+                  <a:solidFill>
+                    <a:srgbClr val="E8E0D4"/>
+                  </a:solidFill>
+                  <a:latin typeface="Consolas"/>
+                  <a:ea typeface="Microsoft YaHei"/>
+                  <a:cs typeface="Consolas"/>
+                </a:rPr>
+                <a:t>, </a:t>
+              </a:r>
+              <a:r>
+                <a:rPr lang="en-US" altLang="zh-CN" sz="1050" dirty="0" err="1">
+                  <a:solidFill>
+                    <a:srgbClr val="E8E0D4"/>
+                  </a:solidFill>
+                  <a:latin typeface="Consolas"/>
+                  <a:ea typeface="Microsoft YaHei"/>
+                  <a:cs typeface="Consolas"/>
+                </a:rPr>
+                <a:t>spectrum_pca</a:t>
+              </a:r>
+              <a:r>
+                <a:rPr lang="en-US" altLang="zh-CN" sz="1050" dirty="0">
+                  <a:solidFill>
+                    <a:srgbClr val="E8E0D4"/>
+                  </a:solidFill>
+                  <a:latin typeface="Consolas"/>
+                  <a:ea typeface="Microsoft YaHei"/>
+                  <a:cs typeface="Consolas"/>
+                </a:rPr>
+                <a:t>) </a:t>
+              </a:r>
+            </a:p>
+            <a:p>
+              <a:r>
+                <a:rPr lang="en-US" altLang="zh-CN" sz="1050" dirty="0">
+                  <a:solidFill>
+                    <a:srgbClr val="E8E0D4"/>
+                  </a:solidFill>
+                  <a:latin typeface="Consolas"/>
+                  <a:ea typeface="Microsoft YaHei"/>
+                  <a:cs typeface="Consolas"/>
+                </a:rPr>
+                <a:t>……</a:t>
+              </a:r>
+              <a:endParaRPr lang="zh-CN" sz="1050" dirty="0">
+                <a:solidFill>
+                  <a:srgbClr val="E8E0D4"/>
+                </a:solidFill>
+                <a:latin typeface="Consolas"/>
+                <a:ea typeface="Microsoft YaHei"/>
+                <a:cs typeface="Consolas"/>
+              </a:endParaRPr>
             </a:p>
           </p:txBody>
         </p:sp>
@@ -11344,35 +11593,6 @@
           <a:chExt cx="0" cy="0"/>
         </a:xfrm>
       </p:grpSpPr>
-      <p:sp>
-        <p:nvSpPr>
-          <p:cNvPr id="2" name="Rectangle 2"/>
-          <p:cNvSpPr/>
-          <p:nvPr/>
-        </p:nvSpPr>
-        <p:spPr>
-          <a:xfrm>
-            <a:off x="0" y="0"/>
-            <a:ext cx="12192000" cy="6858000"/>
-          </a:xfrm>
-          <a:prstGeom prst="rect">
-            <a:avLst/>
-          </a:prstGeom>
-          <a:solidFill>
-            <a:srgbClr val="FDFBF7"/>
-          </a:solidFill>
-          <a:ln>
-            <a:noFill/>
-          </a:ln>
-        </p:spPr>
-        <p:txBody>
-          <a:bodyPr/>
-          <a:lstStyle/>
-          <a:p>
-            <a:endParaRPr lang="zh-CN" altLang="en-US"/>
-          </a:p>
-        </p:txBody>
-      </p:sp>
       <p:grpSp>
         <p:nvGrpSpPr>
           <p:cNvPr id="6" name="Group 6"/>
@@ -11796,30 +12016,6 @@
             </a:p>
           </p:txBody>
         </p:sp>
-        <p:pic>
-          <p:nvPicPr>
-            <p:cNvPr id="16" name="Image 16"/>
-            <p:cNvPicPr>
-              <a:picLocks noChangeAspect="1"/>
-            </p:cNvPicPr>
-            <p:nvPr/>
-          </p:nvPicPr>
-          <p:blipFill>
-            <a:blip r:embed="rId4"/>
-            <a:stretch>
-              <a:fillRect/>
-            </a:stretch>
-          </p:blipFill>
-          <p:spPr>
-            <a:xfrm>
-              <a:off x="6442075" y="1714500"/>
-              <a:ext cx="4927600" cy="3048000"/>
-            </a:xfrm>
-            <a:prstGeom prst="rect">
-              <a:avLst/>
-            </a:prstGeom>
-          </p:spPr>
-        </p:pic>
         <p:sp>
           <p:nvSpPr>
             <p:cNvPr id="17" name="TextBox 17"/>
@@ -11870,7 +12066,7 @@
         <p:spPr>
           <a:xfrm>
             <a:off x="571500" y="5715000"/>
-            <a:ext cx="11049000" cy="571500"/>
+            <a:ext cx="6477000" cy="571500"/>
           </a:xfrm>
           <a:prstGeom prst="roundRect">
             <a:avLst>
@@ -12027,6 +12223,318 @@
           </p:txBody>
         </p:sp>
       </p:grpSp>
+      <p:pic>
+        <p:nvPicPr>
+          <p:cNvPr id="24" name="图形 23">
+            <a:extLst>
+              <a:ext uri="{FF2B5EF4-FFF2-40B4-BE49-F238E27FC236}">
+                <a16:creationId xmlns:a16="http://schemas.microsoft.com/office/drawing/2014/main" id="{544A087A-74E6-E639-8A52-9A16AF32F9CC}"/>
+              </a:ext>
+            </a:extLst>
+          </p:cNvPr>
+          <p:cNvPicPr>
+            <a:picLocks noChangeAspect="1"/>
+          </p:cNvPicPr>
+          <p:nvPr/>
+        </p:nvPicPr>
+        <p:blipFill>
+          <a:blip>
+            <a:extLst>
+              <a:ext uri="{96DAC541-7B7A-43D3-8B79-37D633B846F1}">
+                <asvg:svgBlip xmlns:asvg="http://schemas.microsoft.com/office/drawing/2016/SVG/main" r:embed="rId4"/>
+              </a:ext>
+            </a:extLst>
+          </a:blip>
+          <a:stretch>
+            <a:fillRect/>
+          </a:stretch>
+        </p:blipFill>
+        <p:spPr>
+          <a:xfrm>
+            <a:off x="7910576" y="5677982"/>
+            <a:ext cx="638047" cy="638047"/>
+          </a:xfrm>
+          <a:prstGeom prst="rect">
+            <a:avLst/>
+          </a:prstGeom>
+        </p:spPr>
+      </p:pic>
+      <p:pic>
+        <p:nvPicPr>
+          <p:cNvPr id="25" name="图形 24">
+            <a:extLst>
+              <a:ext uri="{FF2B5EF4-FFF2-40B4-BE49-F238E27FC236}">
+                <a16:creationId xmlns:a16="http://schemas.microsoft.com/office/drawing/2014/main" id="{E63EF898-9DB9-D7FA-4C22-90D29126613A}"/>
+              </a:ext>
+            </a:extLst>
+          </p:cNvPr>
+          <p:cNvPicPr>
+            <a:picLocks noChangeAspect="1"/>
+          </p:cNvPicPr>
+          <p:nvPr/>
+        </p:nvPicPr>
+        <p:blipFill>
+          <a:blip>
+            <a:extLst>
+              <a:ext uri="{96DAC541-7B7A-43D3-8B79-37D633B846F1}">
+                <asvg:svgBlip xmlns:asvg="http://schemas.microsoft.com/office/drawing/2016/SVG/main" r:embed="rId5"/>
+              </a:ext>
+            </a:extLst>
+          </a:blip>
+          <a:stretch>
+            <a:fillRect/>
+          </a:stretch>
+        </p:blipFill>
+        <p:spPr>
+          <a:xfrm>
+            <a:off x="8320279" y="5669823"/>
+            <a:ext cx="638047" cy="638047"/>
+          </a:xfrm>
+          <a:prstGeom prst="rect">
+            <a:avLst/>
+          </a:prstGeom>
+        </p:spPr>
+      </p:pic>
+      <p:pic>
+        <p:nvPicPr>
+          <p:cNvPr id="26" name="图形 25">
+            <a:extLst>
+              <a:ext uri="{FF2B5EF4-FFF2-40B4-BE49-F238E27FC236}">
+                <a16:creationId xmlns:a16="http://schemas.microsoft.com/office/drawing/2014/main" id="{99C313CA-44CE-2A1C-E3D0-14A1B81AA0C1}"/>
+              </a:ext>
+            </a:extLst>
+          </p:cNvPr>
+          <p:cNvPicPr>
+            <a:picLocks noChangeAspect="1"/>
+          </p:cNvPicPr>
+          <p:nvPr/>
+        </p:nvPicPr>
+        <p:blipFill>
+          <a:blip>
+            <a:extLst>
+              <a:ext uri="{96DAC541-7B7A-43D3-8B79-37D633B846F1}">
+                <asvg:svgBlip xmlns:asvg="http://schemas.microsoft.com/office/drawing/2016/SVG/main" r:embed="rId6"/>
+              </a:ext>
+            </a:extLst>
+          </a:blip>
+          <a:stretch>
+            <a:fillRect/>
+          </a:stretch>
+        </p:blipFill>
+        <p:spPr>
+          <a:xfrm>
+            <a:off x="8729982" y="5676900"/>
+            <a:ext cx="638047" cy="638047"/>
+          </a:xfrm>
+          <a:prstGeom prst="rect">
+            <a:avLst/>
+          </a:prstGeom>
+        </p:spPr>
+      </p:pic>
+      <p:pic>
+        <p:nvPicPr>
+          <p:cNvPr id="27" name="图形 26">
+            <a:extLst>
+              <a:ext uri="{FF2B5EF4-FFF2-40B4-BE49-F238E27FC236}">
+                <a16:creationId xmlns:a16="http://schemas.microsoft.com/office/drawing/2014/main" id="{A72442F9-588C-622E-5434-94CDDDA530E3}"/>
+              </a:ext>
+            </a:extLst>
+          </p:cNvPr>
+          <p:cNvPicPr>
+            <a:picLocks noChangeAspect="1"/>
+          </p:cNvPicPr>
+          <p:nvPr/>
+        </p:nvPicPr>
+        <p:blipFill>
+          <a:blip>
+            <a:extLst>
+              <a:ext uri="{96DAC541-7B7A-43D3-8B79-37D633B846F1}">
+                <asvg:svgBlip xmlns:asvg="http://schemas.microsoft.com/office/drawing/2016/SVG/main" r:embed="rId7"/>
+              </a:ext>
+            </a:extLst>
+          </a:blip>
+          <a:stretch>
+            <a:fillRect/>
+          </a:stretch>
+        </p:blipFill>
+        <p:spPr>
+          <a:xfrm>
+            <a:off x="9139685" y="5676900"/>
+            <a:ext cx="638047" cy="638047"/>
+          </a:xfrm>
+          <a:prstGeom prst="rect">
+            <a:avLst/>
+          </a:prstGeom>
+        </p:spPr>
+      </p:pic>
+      <p:pic>
+        <p:nvPicPr>
+          <p:cNvPr id="28" name="图形 27">
+            <a:extLst>
+              <a:ext uri="{FF2B5EF4-FFF2-40B4-BE49-F238E27FC236}">
+                <a16:creationId xmlns:a16="http://schemas.microsoft.com/office/drawing/2014/main" id="{8BEBA25F-9B91-93DD-7A36-763E2A502C11}"/>
+              </a:ext>
+            </a:extLst>
+          </p:cNvPr>
+          <p:cNvPicPr>
+            <a:picLocks noChangeAspect="1"/>
+          </p:cNvPicPr>
+          <p:nvPr/>
+        </p:nvPicPr>
+        <p:blipFill>
+          <a:blip>
+            <a:extLst>
+              <a:ext uri="{96DAC541-7B7A-43D3-8B79-37D633B846F1}">
+                <asvg:svgBlip xmlns:asvg="http://schemas.microsoft.com/office/drawing/2016/SVG/main" r:embed="rId8"/>
+              </a:ext>
+            </a:extLst>
+          </a:blip>
+          <a:stretch>
+            <a:fillRect/>
+          </a:stretch>
+        </p:blipFill>
+        <p:spPr>
+          <a:xfrm>
+            <a:off x="9549388" y="5676900"/>
+            <a:ext cx="638047" cy="638047"/>
+          </a:xfrm>
+          <a:prstGeom prst="rect">
+            <a:avLst/>
+          </a:prstGeom>
+        </p:spPr>
+      </p:pic>
+      <p:pic>
+        <p:nvPicPr>
+          <p:cNvPr id="29" name="图形 28">
+            <a:extLst>
+              <a:ext uri="{FF2B5EF4-FFF2-40B4-BE49-F238E27FC236}">
+                <a16:creationId xmlns:a16="http://schemas.microsoft.com/office/drawing/2014/main" id="{15E5D50C-D30A-16A3-1591-7AA67144D71D}"/>
+              </a:ext>
+            </a:extLst>
+          </p:cNvPr>
+          <p:cNvPicPr>
+            <a:picLocks noChangeAspect="1"/>
+          </p:cNvPicPr>
+          <p:nvPr/>
+        </p:nvPicPr>
+        <p:blipFill>
+          <a:blip>
+            <a:extLst>
+              <a:ext uri="{96DAC541-7B7A-43D3-8B79-37D633B846F1}">
+                <asvg:svgBlip xmlns:asvg="http://schemas.microsoft.com/office/drawing/2016/SVG/main" r:embed="rId9"/>
+              </a:ext>
+            </a:extLst>
+          </a:blip>
+          <a:stretch>
+            <a:fillRect/>
+          </a:stretch>
+        </p:blipFill>
+        <p:spPr>
+          <a:xfrm>
+            <a:off x="9936988" y="5676900"/>
+            <a:ext cx="638047" cy="638047"/>
+          </a:xfrm>
+          <a:prstGeom prst="rect">
+            <a:avLst/>
+          </a:prstGeom>
+        </p:spPr>
+      </p:pic>
+      <p:pic>
+        <p:nvPicPr>
+          <p:cNvPr id="30" name="图形 29">
+            <a:extLst>
+              <a:ext uri="{FF2B5EF4-FFF2-40B4-BE49-F238E27FC236}">
+                <a16:creationId xmlns:a16="http://schemas.microsoft.com/office/drawing/2014/main" id="{A4111A37-9D56-5D02-02CC-E6076DA529B6}"/>
+              </a:ext>
+            </a:extLst>
+          </p:cNvPr>
+          <p:cNvPicPr>
+            <a:picLocks noChangeAspect="1"/>
+          </p:cNvPicPr>
+          <p:nvPr/>
+        </p:nvPicPr>
+        <p:blipFill>
+          <a:blip>
+            <a:extLst>
+              <a:ext uri="{96DAC541-7B7A-43D3-8B79-37D633B846F1}">
+                <asvg:svgBlip xmlns:asvg="http://schemas.microsoft.com/office/drawing/2016/SVG/main" r:embed="rId10"/>
+              </a:ext>
+            </a:extLst>
+          </a:blip>
+          <a:stretch>
+            <a:fillRect/>
+          </a:stretch>
+        </p:blipFill>
+        <p:spPr>
+          <a:xfrm>
+            <a:off x="10324588" y="5676900"/>
+            <a:ext cx="638047" cy="638047"/>
+          </a:xfrm>
+          <a:prstGeom prst="rect">
+            <a:avLst/>
+          </a:prstGeom>
+        </p:spPr>
+      </p:pic>
+      <p:pic>
+        <p:nvPicPr>
+          <p:cNvPr id="32" name="图片 31">
+            <a:extLst>
+              <a:ext uri="{FF2B5EF4-FFF2-40B4-BE49-F238E27FC236}">
+                <a16:creationId xmlns:a16="http://schemas.microsoft.com/office/drawing/2014/main" id="{0EABFC83-852B-9D1C-6E36-E799F199548B}"/>
+              </a:ext>
+            </a:extLst>
+          </p:cNvPr>
+          <p:cNvPicPr>
+            <a:picLocks noChangeAspect="1"/>
+          </p:cNvPicPr>
+          <p:nvPr/>
+        </p:nvPicPr>
+        <p:blipFill>
+          <a:blip r:embed="rId11"/>
+          <a:stretch>
+            <a:fillRect/>
+          </a:stretch>
+        </p:blipFill>
+        <p:spPr>
+          <a:xfrm>
+            <a:off x="6320691" y="1736227"/>
+            <a:ext cx="5170368" cy="3182483"/>
+          </a:xfrm>
+          <a:prstGeom prst="rect">
+            <a:avLst/>
+          </a:prstGeom>
+        </p:spPr>
+      </p:pic>
+      <p:pic>
+        <p:nvPicPr>
+          <p:cNvPr id="34" name="图片 33">
+            <a:extLst>
+              <a:ext uri="{FF2B5EF4-FFF2-40B4-BE49-F238E27FC236}">
+                <a16:creationId xmlns:a16="http://schemas.microsoft.com/office/drawing/2014/main" id="{B5A00D00-5765-C82C-DF0A-D5503B4FF83E}"/>
+              </a:ext>
+            </a:extLst>
+          </p:cNvPr>
+          <p:cNvPicPr>
+            <a:picLocks noChangeAspect="1"/>
+          </p:cNvPicPr>
+          <p:nvPr/>
+        </p:nvPicPr>
+        <p:blipFill>
+          <a:blip r:embed="rId12"/>
+          <a:stretch>
+            <a:fillRect/>
+          </a:stretch>
+        </p:blipFill>
+        <p:spPr>
+          <a:xfrm>
+            <a:off x="2174113" y="2171700"/>
+            <a:ext cx="7772400" cy="2342108"/>
+          </a:xfrm>
+          <a:prstGeom prst="rect">
+            <a:avLst/>
+          </a:prstGeom>
+        </p:spPr>
+      </p:pic>
     </p:spTree>
   </p:cSld>
   <p:clrMapOvr>
@@ -12102,24 +12610,59 @@
                                   </p:childTnLst>
                                 </p:cTn>
                               </p:par>
-                            </p:childTnLst>
-                          </p:cTn>
-                        </p:par>
-                        <p:par>
-                          <p:cTn id="8" fill="hold">
-                            <p:stCondLst>
-                              <p:cond delay="900"/>
-                            </p:stCondLst>
-                            <p:childTnLst>
                               <p:par>
-                                <p:cTn id="9" presetID="10" presetClass="entr" presetSubtype="0" fill="hold" nodeType="afterEffect">
+                                <p:cTn id="8" presetID="9" presetClass="entr" presetSubtype="0" fill="hold" nodeType="withEffect">
                                   <p:stCondLst>
                                     <p:cond delay="0"/>
                                   </p:stCondLst>
                                   <p:childTnLst>
                                     <p:set>
                                       <p:cBhvr>
-                                        <p:cTn id="10" dur="1" fill="hold">
+                                        <p:cTn id="9" dur="1" fill="hold">
+                                          <p:stCondLst>
+                                            <p:cond delay="0"/>
+                                          </p:stCondLst>
+                                        </p:cTn>
+                                        <p:tgtEl>
+                                          <p:spTgt spid="32"/>
+                                        </p:tgtEl>
+                                        <p:attrNameLst>
+                                          <p:attrName>style.visibility</p:attrName>
+                                        </p:attrNameLst>
+                                      </p:cBhvr>
+                                      <p:to>
+                                        <p:strVal val="visible"/>
+                                      </p:to>
+                                    </p:set>
+                                    <p:animEffect transition="in" filter="dissolve">
+                                      <p:cBhvr>
+                                        <p:cTn id="10" dur="500"/>
+                                        <p:tgtEl>
+                                          <p:spTgt spid="32"/>
+                                        </p:tgtEl>
+                                      </p:cBhvr>
+                                    </p:animEffect>
+                                  </p:childTnLst>
+                                </p:cTn>
+                              </p:par>
+                            </p:childTnLst>
+                          </p:cTn>
+                        </p:par>
+                        <p:par>
+                          <p:cTn id="11" fill="hold">
+                            <p:stCondLst>
+                              <p:cond delay="500"/>
+                            </p:stCondLst>
+                            <p:childTnLst>
+                              <p:par>
+                                <p:cTn id="12" presetID="10" presetClass="entr" presetSubtype="0" fill="hold" nodeType="afterEffect">
+                                  <p:stCondLst>
+                                    <p:cond delay="0"/>
+                                  </p:stCondLst>
+                                  <p:childTnLst>
+                                    <p:set>
+                                      <p:cBhvr>
+                                        <p:cTn id="13" dur="1" fill="hold">
                                           <p:stCondLst>
                                             <p:cond delay="0"/>
                                           </p:stCondLst>
@@ -12137,9 +12680,62 @@
                                     </p:set>
                                     <p:animEffect transition="in" filter="fade">
                                       <p:cBhvr>
-                                        <p:cTn id="11" dur="400"/>
+                                        <p:cTn id="14" dur="400"/>
                                         <p:tgtEl>
                                           <p:spTgt spid="18"/>
+                                        </p:tgtEl>
+                                      </p:cBhvr>
+                                    </p:animEffect>
+                                  </p:childTnLst>
+                                </p:cTn>
+                              </p:par>
+                            </p:childTnLst>
+                          </p:cTn>
+                        </p:par>
+                      </p:childTnLst>
+                    </p:cTn>
+                  </p:par>
+                  <p:par>
+                    <p:cTn id="15" fill="hold">
+                      <p:stCondLst>
+                        <p:cond delay="indefinite"/>
+                      </p:stCondLst>
+                      <p:childTnLst>
+                        <p:par>
+                          <p:cTn id="16" fill="hold">
+                            <p:stCondLst>
+                              <p:cond delay="0"/>
+                            </p:stCondLst>
+                            <p:childTnLst>
+                              <p:par>
+                                <p:cTn id="17" presetID="9" presetClass="entr" presetSubtype="0" fill="hold" nodeType="clickEffect">
+                                  <p:stCondLst>
+                                    <p:cond delay="0"/>
+                                  </p:stCondLst>
+                                  <p:childTnLst>
+                                    <p:set>
+                                      <p:cBhvr>
+                                        <p:cTn id="18" dur="1" fill="hold">
+                                          <p:stCondLst>
+                                            <p:cond delay="0"/>
+                                          </p:stCondLst>
+                                        </p:cTn>
+                                        <p:tgtEl>
+                                          <p:spTgt spid="34"/>
+                                        </p:tgtEl>
+                                        <p:attrNameLst>
+                                          <p:attrName>style.visibility</p:attrName>
+                                        </p:attrNameLst>
+                                      </p:cBhvr>
+                                      <p:to>
+                                        <p:strVal val="visible"/>
+                                      </p:to>
+                                    </p:set>
+                                    <p:animEffect transition="in" filter="dissolve">
+                                      <p:cBhvr>
+                                        <p:cTn id="19" dur="500"/>
+                                        <p:tgtEl>
+                                          <p:spTgt spid="34"/>
                                         </p:tgtEl>
                                       </p:cBhvr>
                                     </p:animEffect>
@@ -12236,9 +12832,9 @@
         <p:grpSpPr>
           <a:xfrm>
             <a:off x="535305" y="379095"/>
-            <a:ext cx="2865739" cy="921067"/>
+            <a:ext cx="1827423" cy="780529"/>
             <a:chOff x="535305" y="379095"/>
-            <a:chExt cx="2865739" cy="921067"/>
+            <a:chExt cx="1827423" cy="780529"/>
           </a:xfrm>
         </p:grpSpPr>
         <p:sp>
@@ -12321,7 +12917,7 @@
           <p:spPr>
             <a:xfrm>
               <a:off x="535305" y="721042"/>
-              <a:ext cx="2865739" cy="579120"/>
+              <a:ext cx="1827423" cy="438582"/>
             </a:xfrm>
             <a:prstGeom prst="rect">
               <a:avLst/>
@@ -12347,482 +12943,7 @@
                   <a:ea typeface="Microsoft YaHei"/>
                   <a:cs typeface="Arial"/>
                 </a:rPr>
-                <a:t>项目特色与不足</a:t>
-              </a:r>
-            </a:p>
-          </p:txBody>
-        </p:sp>
-      </p:grpSp>
-      <p:grpSp>
-        <p:nvGrpSpPr>
-          <p:cNvPr id="22" name="Group 22"/>
-          <p:cNvGrpSpPr/>
-          <p:nvPr/>
-        </p:nvGrpSpPr>
-        <p:grpSpPr>
-          <a:xfrm>
-            <a:off x="571500" y="1238250"/>
-            <a:ext cx="5348681" cy="4632255"/>
-            <a:chOff x="571500" y="1238250"/>
-            <a:chExt cx="5348681" cy="4632255"/>
-          </a:xfrm>
-        </p:grpSpPr>
-        <p:sp>
-          <p:nvSpPr>
-            <p:cNvPr id="7" name="Rectangle 7"/>
-            <p:cNvSpPr/>
-            <p:nvPr/>
-          </p:nvSpPr>
-          <p:spPr>
-            <a:xfrm>
-              <a:off x="586181" y="1298505"/>
-              <a:ext cx="5334000" cy="4572000"/>
-            </a:xfrm>
-            <a:prstGeom prst="roundRect">
-              <a:avLst>
-                <a:gd name="adj" fmla="val 2500"/>
-              </a:avLst>
-            </a:prstGeom>
-            <a:solidFill>
-              <a:srgbClr val="FFF8EE"/>
-            </a:solidFill>
-            <a:ln>
-              <a:noFill/>
-            </a:ln>
-          </p:spPr>
-          <p:txBody>
-            <a:bodyPr/>
-            <a:lstStyle/>
-            <a:p>
-              <a:endParaRPr lang="zh-CN" altLang="en-US"/>
-            </a:p>
-          </p:txBody>
-        </p:sp>
-        <p:sp>
-          <p:nvSpPr>
-            <p:cNvPr id="8" name="Rectangle 8"/>
-            <p:cNvSpPr/>
-            <p:nvPr/>
-          </p:nvSpPr>
-          <p:spPr>
-            <a:xfrm>
-              <a:off x="571500" y="1238250"/>
-              <a:ext cx="5334000" cy="47625"/>
-            </a:xfrm>
-            <a:prstGeom prst="roundRect">
-              <a:avLst>
-                <a:gd name="adj" fmla="val 40000"/>
-              </a:avLst>
-            </a:prstGeom>
-            <a:solidFill>
-              <a:srgbClr val="3D8B5E"/>
-            </a:solidFill>
-            <a:ln>
-              <a:noFill/>
-            </a:ln>
-          </p:spPr>
-          <p:txBody>
-            <a:bodyPr/>
-            <a:lstStyle/>
-            <a:p>
-              <a:endParaRPr lang="zh-CN" altLang="en-US"/>
-            </a:p>
-          </p:txBody>
-        </p:sp>
-        <p:sp>
-          <p:nvSpPr>
-            <p:cNvPr id="9" name="TextBox 9"/>
-            <p:cNvSpPr txBox="1"/>
-            <p:nvPr/>
-          </p:nvSpPr>
-          <p:spPr>
-            <a:xfrm>
-              <a:off x="739140" y="1424940"/>
-              <a:ext cx="1053846" cy="365760"/>
-            </a:xfrm>
-            <a:prstGeom prst="rect">
-              <a:avLst/>
-            </a:prstGeom>
-            <a:noFill/>
-            <a:ln>
-              <a:noFill/>
-            </a:ln>
-          </p:spPr>
-          <p:txBody>
-            <a:bodyPr wrap="none" lIns="0" tIns="0" rIns="0" bIns="0" anchor="t" anchorCtr="0">
-              <a:spAutoFit/>
-            </a:bodyPr>
-            <a:lstStyle/>
-            <a:p>
-              <a:pPr algn="l"/>
-              <a:r>
-                <a:rPr lang="zh-CN" sz="1800" b="1" dirty="0">
-                  <a:solidFill>
-                    <a:srgbClr val="3D8B5E"/>
-                  </a:solidFill>
-                  <a:latin typeface="Arial"/>
-                  <a:ea typeface="Microsoft YaHei"/>
-                  <a:cs typeface="Arial"/>
-                </a:rPr>
-                <a:t>项目特色</a:t>
-              </a:r>
-            </a:p>
-          </p:txBody>
-        </p:sp>
-        <p:sp>
-          <p:nvSpPr>
-            <p:cNvPr id="10" name="Rectangle 10"/>
-            <p:cNvSpPr/>
-            <p:nvPr/>
-          </p:nvSpPr>
-          <p:spPr>
-            <a:xfrm>
-              <a:off x="762000" y="1857375"/>
-              <a:ext cx="4953000" cy="523875"/>
-            </a:xfrm>
-            <a:prstGeom prst="roundRect">
-              <a:avLst>
-                <a:gd name="adj" fmla="val 14545"/>
-              </a:avLst>
-            </a:prstGeom>
-            <a:solidFill>
-              <a:srgbClr val="3D8B5E">
-                <a:alpha val="6000"/>
-              </a:srgbClr>
-            </a:solidFill>
-            <a:ln>
-              <a:noFill/>
-            </a:ln>
-          </p:spPr>
-          <p:txBody>
-            <a:bodyPr/>
-            <a:lstStyle/>
-            <a:p>
-              <a:endParaRPr lang="zh-CN" altLang="en-US"/>
-            </a:p>
-          </p:txBody>
-        </p:sp>
-        <p:sp>
-          <p:nvSpPr>
-            <p:cNvPr id="11" name="TextBox 11"/>
-            <p:cNvSpPr txBox="1"/>
-            <p:nvPr/>
-          </p:nvSpPr>
-          <p:spPr>
-            <a:xfrm>
-              <a:off x="935355" y="2025968"/>
-              <a:ext cx="2446592" cy="274320"/>
-            </a:xfrm>
-            <a:prstGeom prst="rect">
-              <a:avLst/>
-            </a:prstGeom>
-            <a:noFill/>
-            <a:ln>
-              <a:noFill/>
-            </a:ln>
-          </p:spPr>
-          <p:txBody>
-            <a:bodyPr wrap="none" lIns="0" tIns="0" rIns="0" bIns="0" anchor="t" anchorCtr="0">
-              <a:spAutoFit/>
-            </a:bodyPr>
-            <a:lstStyle/>
-            <a:p>
-              <a:pPr algn="l"/>
-              <a:r>
-                <a:rPr lang="zh-CN" sz="1350" dirty="0">
-                  <a:solidFill>
-                    <a:srgbClr val="2D2A26"/>
-                  </a:solidFill>
-                  <a:latin typeface="Arial"/>
-                  <a:ea typeface="Microsoft YaHei"/>
-                  <a:cs typeface="Arial"/>
-                </a:rPr>
-                <a:t>1. 使用真实公开天光光谱数据</a:t>
-              </a:r>
-            </a:p>
-          </p:txBody>
-        </p:sp>
-        <p:sp>
-          <p:nvSpPr>
-            <p:cNvPr id="12" name="Rectangle 12"/>
-            <p:cNvSpPr/>
-            <p:nvPr/>
-          </p:nvSpPr>
-          <p:spPr>
-            <a:xfrm>
-              <a:off x="762000" y="2476500"/>
-              <a:ext cx="4953000" cy="523875"/>
-            </a:xfrm>
-            <a:prstGeom prst="roundRect">
-              <a:avLst>
-                <a:gd name="adj" fmla="val 14545"/>
-              </a:avLst>
-            </a:prstGeom>
-            <a:solidFill>
-              <a:srgbClr val="2AA3A0">
-                <a:alpha val="6000"/>
-              </a:srgbClr>
-            </a:solidFill>
-            <a:ln>
-              <a:noFill/>
-            </a:ln>
-          </p:spPr>
-          <p:txBody>
-            <a:bodyPr/>
-            <a:lstStyle/>
-            <a:p>
-              <a:endParaRPr lang="zh-CN" altLang="en-US"/>
-            </a:p>
-          </p:txBody>
-        </p:sp>
-        <p:sp>
-          <p:nvSpPr>
-            <p:cNvPr id="14" name="Rectangle 14"/>
-            <p:cNvSpPr/>
-            <p:nvPr/>
-          </p:nvSpPr>
-          <p:spPr>
-            <a:xfrm>
-              <a:off x="762000" y="3095625"/>
-              <a:ext cx="4953000" cy="523875"/>
-            </a:xfrm>
-            <a:prstGeom prst="roundRect">
-              <a:avLst>
-                <a:gd name="adj" fmla="val 14545"/>
-              </a:avLst>
-            </a:prstGeom>
-            <a:solidFill>
-              <a:srgbClr val="8B6DB0">
-                <a:alpha val="6000"/>
-              </a:srgbClr>
-            </a:solidFill>
-            <a:ln>
-              <a:noFill/>
-            </a:ln>
-          </p:spPr>
-          <p:txBody>
-            <a:bodyPr/>
-            <a:lstStyle/>
-            <a:p>
-              <a:endParaRPr lang="zh-CN" altLang="en-US"/>
-            </a:p>
-          </p:txBody>
-        </p:sp>
-        <p:sp>
-          <p:nvSpPr>
-            <p:cNvPr id="15" name="TextBox 15"/>
-            <p:cNvSpPr txBox="1"/>
-            <p:nvPr/>
-          </p:nvSpPr>
-          <p:spPr>
-            <a:xfrm>
-              <a:off x="935355" y="2629376"/>
-              <a:ext cx="3900107" cy="207749"/>
-            </a:xfrm>
-            <a:prstGeom prst="rect">
-              <a:avLst/>
-            </a:prstGeom>
-            <a:noFill/>
-            <a:ln>
-              <a:noFill/>
-            </a:ln>
-          </p:spPr>
-          <p:txBody>
-            <a:bodyPr wrap="none" lIns="0" tIns="0" rIns="0" bIns="0" anchor="t" anchorCtr="0">
-              <a:spAutoFit/>
-            </a:bodyPr>
-            <a:lstStyle/>
-            <a:p>
-              <a:pPr algn="l"/>
-              <a:r>
-                <a:rPr lang="en-US" altLang="zh-CN" sz="1350" dirty="0">
-                  <a:solidFill>
-                    <a:srgbClr val="2D2A26"/>
-                  </a:solidFill>
-                  <a:latin typeface="Arial"/>
-                  <a:ea typeface="Microsoft YaHei"/>
-                  <a:cs typeface="Arial"/>
-                </a:rPr>
-                <a:t>2</a:t>
-              </a:r>
-              <a:r>
-                <a:rPr lang="zh-CN" sz="1350" dirty="0">
-                  <a:solidFill>
-                    <a:srgbClr val="2D2A26"/>
-                  </a:solidFill>
-                  <a:latin typeface="Arial"/>
-                  <a:ea typeface="Microsoft YaHei"/>
-                  <a:cs typeface="Arial"/>
-                </a:rPr>
-                <a:t>. 覆盖数据处理、PCA、ML、可视化</a:t>
-              </a:r>
-              <a:r>
-                <a:rPr lang="zh-CN" altLang="en-US" sz="1350" dirty="0">
-                  <a:solidFill>
-                    <a:srgbClr val="2D2A26"/>
-                  </a:solidFill>
-                  <a:latin typeface="Arial"/>
-                  <a:ea typeface="Microsoft YaHei"/>
-                  <a:cs typeface="Arial"/>
-                </a:rPr>
-                <a:t>与应用</a:t>
-              </a:r>
-              <a:r>
-                <a:rPr lang="zh-CN" sz="1350" dirty="0">
-                  <a:solidFill>
-                    <a:srgbClr val="2D2A26"/>
-                  </a:solidFill>
-                  <a:latin typeface="Arial"/>
-                  <a:ea typeface="Microsoft YaHei"/>
-                  <a:cs typeface="Arial"/>
-                </a:rPr>
-                <a:t>全流程</a:t>
-              </a:r>
-            </a:p>
-          </p:txBody>
-        </p:sp>
-        <p:sp>
-          <p:nvSpPr>
-            <p:cNvPr id="16" name="Rectangle 16"/>
-            <p:cNvSpPr/>
-            <p:nvPr/>
-          </p:nvSpPr>
-          <p:spPr>
-            <a:xfrm>
-              <a:off x="762000" y="3714750"/>
-              <a:ext cx="4953000" cy="523875"/>
-            </a:xfrm>
-            <a:prstGeom prst="roundRect">
-              <a:avLst>
-                <a:gd name="adj" fmla="val 14545"/>
-              </a:avLst>
-            </a:prstGeom>
-            <a:solidFill>
-              <a:srgbClr val="E8842A">
-                <a:alpha val="6000"/>
-              </a:srgbClr>
-            </a:solidFill>
-            <a:ln>
-              <a:noFill/>
-            </a:ln>
-          </p:spPr>
-          <p:txBody>
-            <a:bodyPr/>
-            <a:lstStyle/>
-            <a:p>
-              <a:endParaRPr lang="zh-CN" altLang="en-US"/>
-            </a:p>
-          </p:txBody>
-        </p:sp>
-        <p:sp>
-          <p:nvSpPr>
-            <p:cNvPr id="17" name="TextBox 17"/>
-            <p:cNvSpPr txBox="1"/>
-            <p:nvPr/>
-          </p:nvSpPr>
-          <p:spPr>
-            <a:xfrm>
-              <a:off x="935355" y="3891563"/>
-              <a:ext cx="2986659" cy="274320"/>
-            </a:xfrm>
-            <a:prstGeom prst="rect">
-              <a:avLst/>
-            </a:prstGeom>
-            <a:noFill/>
-            <a:ln>
-              <a:noFill/>
-            </a:ln>
-          </p:spPr>
-          <p:txBody>
-            <a:bodyPr wrap="none" lIns="0" tIns="0" rIns="0" bIns="0" anchor="t" anchorCtr="0">
-              <a:spAutoFit/>
-            </a:bodyPr>
-            <a:lstStyle/>
-            <a:p>
-              <a:pPr algn="l"/>
-              <a:r>
-                <a:rPr lang="zh-CN" sz="1350" dirty="0">
-                  <a:solidFill>
-                    <a:srgbClr val="2D2A26"/>
-                  </a:solidFill>
-                  <a:latin typeface="Arial"/>
-                  <a:ea typeface="Microsoft YaHei"/>
-                  <a:cs typeface="Arial"/>
-                </a:rPr>
-                <a:t>4. 多模型统一比较，按结果选择模型</a:t>
-              </a:r>
-            </a:p>
-          </p:txBody>
-        </p:sp>
-        <p:sp>
-          <p:nvSpPr>
-            <p:cNvPr id="18" name="Rectangle 18"/>
-            <p:cNvSpPr/>
-            <p:nvPr/>
-          </p:nvSpPr>
-          <p:spPr>
-            <a:xfrm>
-              <a:off x="762000" y="4333875"/>
-              <a:ext cx="4953000" cy="523875"/>
-            </a:xfrm>
-            <a:prstGeom prst="roundRect">
-              <a:avLst>
-                <a:gd name="adj" fmla="val 14545"/>
-              </a:avLst>
-            </a:prstGeom>
-            <a:solidFill>
-              <a:srgbClr val="D4940A">
-                <a:alpha val="6000"/>
-              </a:srgbClr>
-            </a:solidFill>
-            <a:ln>
-              <a:noFill/>
-            </a:ln>
-          </p:spPr>
-          <p:txBody>
-            <a:bodyPr/>
-            <a:lstStyle/>
-            <a:p>
-              <a:endParaRPr lang="zh-CN" altLang="en-US"/>
-            </a:p>
-          </p:txBody>
-        </p:sp>
-        <p:sp>
-          <p:nvSpPr>
-            <p:cNvPr id="19" name="TextBox 19"/>
-            <p:cNvSpPr txBox="1"/>
-            <p:nvPr/>
-          </p:nvSpPr>
-          <p:spPr>
-            <a:xfrm>
-              <a:off x="935355" y="4468178"/>
-              <a:ext cx="3346704" cy="274320"/>
-            </a:xfrm>
-            <a:prstGeom prst="rect">
-              <a:avLst/>
-            </a:prstGeom>
-            <a:noFill/>
-            <a:ln>
-              <a:noFill/>
-            </a:ln>
-          </p:spPr>
-          <p:txBody>
-            <a:bodyPr wrap="none" lIns="0" tIns="0" rIns="0" bIns="0" anchor="t" anchorCtr="0">
-              <a:spAutoFit/>
-            </a:bodyPr>
-            <a:lstStyle/>
-            <a:p>
-              <a:pPr algn="l"/>
-              <a:r>
-                <a:rPr lang="zh-CN" sz="1350" dirty="0">
-                  <a:solidFill>
-                    <a:srgbClr val="2D2A26"/>
-                  </a:solidFill>
-                  <a:latin typeface="Arial"/>
-                  <a:ea typeface="Microsoft YaHei"/>
-                  <a:cs typeface="Arial"/>
-                </a:rPr>
-                <a:t>5. 预测光谱用于照明补偿，形成应用闭环</a:t>
+                <a:t>特色与不足</a:t>
               </a:r>
             </a:p>
           </p:txBody>
@@ -13665,82 +13786,578 @@
           </p:txBody>
         </p:sp>
       </p:grpSp>
-      <p:sp>
-        <p:nvSpPr>
-          <p:cNvPr id="45" name="TextBox 15">
+      <p:grpSp>
+        <p:nvGrpSpPr>
+          <p:cNvPr id="13" name="组合 12">
             <a:extLst>
               <a:ext uri="{FF2B5EF4-FFF2-40B4-BE49-F238E27FC236}">
-                <a16:creationId xmlns:a16="http://schemas.microsoft.com/office/drawing/2014/main" id="{0A81B17F-609B-12F7-B8EC-EB4EF36D6134}"/>
+                <a16:creationId xmlns:a16="http://schemas.microsoft.com/office/drawing/2014/main" id="{561446AE-E904-ECF3-309F-53375224FBE3}"/>
               </a:ext>
             </a:extLst>
           </p:cNvPr>
-          <p:cNvSpPr txBox="1"/>
+          <p:cNvGrpSpPr/>
           <p:nvPr/>
-        </p:nvSpPr>
-        <p:spPr>
+        </p:nvGrpSpPr>
+        <p:grpSpPr>
           <a:xfrm>
-            <a:off x="935354" y="3255904"/>
-            <a:ext cx="3654847" cy="207749"/>
+            <a:off x="571500" y="1238250"/>
+            <a:ext cx="5348681" cy="4632255"/>
+            <a:chOff x="571500" y="1238250"/>
+            <a:chExt cx="5348681" cy="4632255"/>
           </a:xfrm>
-          <a:prstGeom prst="rect">
-            <a:avLst/>
-          </a:prstGeom>
-          <a:noFill/>
-          <a:ln>
-            <a:noFill/>
-          </a:ln>
-        </p:spPr>
-        <p:txBody>
-          <a:bodyPr wrap="none" lIns="0" tIns="0" rIns="0" bIns="0" anchor="t" anchorCtr="0">
-            <a:spAutoFit/>
-          </a:bodyPr>
-          <a:lstStyle/>
-          <a:p>
-            <a:pPr algn="l"/>
-            <a:r>
-              <a:rPr lang="en-US" altLang="zh-CN" sz="1350" dirty="0">
+        </p:grpSpPr>
+        <p:grpSp>
+          <p:nvGrpSpPr>
+            <p:cNvPr id="22" name="Group 22"/>
+            <p:cNvGrpSpPr/>
+            <p:nvPr/>
+          </p:nvGrpSpPr>
+          <p:grpSpPr>
+            <a:xfrm>
+              <a:off x="571500" y="1238250"/>
+              <a:ext cx="5348681" cy="4632255"/>
+              <a:chOff x="571500" y="1238250"/>
+              <a:chExt cx="5348681" cy="4632255"/>
+            </a:xfrm>
+          </p:grpSpPr>
+          <p:sp>
+            <p:nvSpPr>
+              <p:cNvPr id="7" name="Rectangle 7"/>
+              <p:cNvSpPr/>
+              <p:nvPr/>
+            </p:nvSpPr>
+            <p:spPr>
+              <a:xfrm>
+                <a:off x="586181" y="1298505"/>
+                <a:ext cx="5334000" cy="4572000"/>
+              </a:xfrm>
+              <a:prstGeom prst="roundRect">
+                <a:avLst>
+                  <a:gd name="adj" fmla="val 2500"/>
+                </a:avLst>
+              </a:prstGeom>
+              <a:solidFill>
+                <a:srgbClr val="FFF8EE"/>
+              </a:solidFill>
+              <a:ln>
+                <a:noFill/>
+              </a:ln>
+            </p:spPr>
+            <p:txBody>
+              <a:bodyPr/>
+              <a:lstStyle/>
+              <a:p>
+                <a:endParaRPr lang="zh-CN" altLang="en-US"/>
+              </a:p>
+            </p:txBody>
+          </p:sp>
+          <p:sp>
+            <p:nvSpPr>
+              <p:cNvPr id="8" name="Rectangle 8"/>
+              <p:cNvSpPr/>
+              <p:nvPr/>
+            </p:nvSpPr>
+            <p:spPr>
+              <a:xfrm>
+                <a:off x="571500" y="1238250"/>
+                <a:ext cx="5334000" cy="47625"/>
+              </a:xfrm>
+              <a:prstGeom prst="roundRect">
+                <a:avLst>
+                  <a:gd name="adj" fmla="val 40000"/>
+                </a:avLst>
+              </a:prstGeom>
+              <a:solidFill>
+                <a:srgbClr val="3D8B5E"/>
+              </a:solidFill>
+              <a:ln>
+                <a:noFill/>
+              </a:ln>
+            </p:spPr>
+            <p:txBody>
+              <a:bodyPr/>
+              <a:lstStyle/>
+              <a:p>
+                <a:endParaRPr lang="zh-CN" altLang="en-US"/>
+              </a:p>
+            </p:txBody>
+          </p:sp>
+          <p:sp>
+            <p:nvSpPr>
+              <p:cNvPr id="9" name="TextBox 9"/>
+              <p:cNvSpPr txBox="1"/>
+              <p:nvPr/>
+            </p:nvSpPr>
+            <p:spPr>
+              <a:xfrm>
+                <a:off x="739140" y="1424940"/>
+                <a:ext cx="461665" cy="276999"/>
+              </a:xfrm>
+              <a:prstGeom prst="rect">
+                <a:avLst/>
+              </a:prstGeom>
+              <a:noFill/>
+              <a:ln>
+                <a:noFill/>
+              </a:ln>
+            </p:spPr>
+            <p:txBody>
+              <a:bodyPr wrap="none" lIns="0" tIns="0" rIns="0" bIns="0" anchor="t" anchorCtr="0">
+                <a:spAutoFit/>
+              </a:bodyPr>
+              <a:lstStyle/>
+              <a:p>
+                <a:pPr algn="l"/>
+                <a:r>
+                  <a:rPr lang="zh-CN" sz="1800" b="1" dirty="0">
+                    <a:solidFill>
+                      <a:srgbClr val="3D8B5E"/>
+                    </a:solidFill>
+                    <a:latin typeface="Arial"/>
+                    <a:ea typeface="Microsoft YaHei"/>
+                    <a:cs typeface="Arial"/>
+                  </a:rPr>
+                  <a:t>特色</a:t>
+                </a:r>
+              </a:p>
+            </p:txBody>
+          </p:sp>
+          <p:sp>
+            <p:nvSpPr>
+              <p:cNvPr id="10" name="Rectangle 10"/>
+              <p:cNvSpPr/>
+              <p:nvPr/>
+            </p:nvSpPr>
+            <p:spPr>
+              <a:xfrm>
+                <a:off x="762000" y="1857375"/>
+                <a:ext cx="4953000" cy="523875"/>
+              </a:xfrm>
+              <a:prstGeom prst="roundRect">
+                <a:avLst>
+                  <a:gd name="adj" fmla="val 14545"/>
+                </a:avLst>
+              </a:prstGeom>
+              <a:solidFill>
+                <a:srgbClr val="3D8B5E">
+                  <a:alpha val="6000"/>
+                </a:srgbClr>
+              </a:solidFill>
+              <a:ln>
+                <a:noFill/>
+              </a:ln>
+            </p:spPr>
+            <p:txBody>
+              <a:bodyPr/>
+              <a:lstStyle/>
+              <a:p>
+                <a:endParaRPr lang="zh-CN" altLang="en-US"/>
+              </a:p>
+            </p:txBody>
+          </p:sp>
+          <p:sp>
+            <p:nvSpPr>
+              <p:cNvPr id="11" name="TextBox 11"/>
+              <p:cNvSpPr txBox="1"/>
+              <p:nvPr/>
+            </p:nvSpPr>
+            <p:spPr>
+              <a:xfrm>
+                <a:off x="935355" y="2025968"/>
+                <a:ext cx="2446592" cy="274320"/>
+              </a:xfrm>
+              <a:prstGeom prst="rect">
+                <a:avLst/>
+              </a:prstGeom>
+              <a:noFill/>
+              <a:ln>
+                <a:noFill/>
+              </a:ln>
+            </p:spPr>
+            <p:txBody>
+              <a:bodyPr wrap="none" lIns="0" tIns="0" rIns="0" bIns="0" anchor="t" anchorCtr="0">
+                <a:spAutoFit/>
+              </a:bodyPr>
+              <a:lstStyle/>
+              <a:p>
+                <a:pPr algn="l"/>
+                <a:r>
+                  <a:rPr lang="zh-CN" sz="1350" dirty="0">
+                    <a:solidFill>
+                      <a:srgbClr val="2D2A26"/>
+                    </a:solidFill>
+                    <a:latin typeface="Arial"/>
+                    <a:ea typeface="Microsoft YaHei"/>
+                    <a:cs typeface="Arial"/>
+                  </a:rPr>
+                  <a:t>1. 使用真实公开天光光谱数据</a:t>
+                </a:r>
+              </a:p>
+            </p:txBody>
+          </p:sp>
+          <p:sp>
+            <p:nvSpPr>
+              <p:cNvPr id="12" name="Rectangle 12"/>
+              <p:cNvSpPr/>
+              <p:nvPr/>
+            </p:nvSpPr>
+            <p:spPr>
+              <a:xfrm>
+                <a:off x="762000" y="2476500"/>
+                <a:ext cx="4953000" cy="523875"/>
+              </a:xfrm>
+              <a:prstGeom prst="roundRect">
+                <a:avLst>
+                  <a:gd name="adj" fmla="val 14545"/>
+                </a:avLst>
+              </a:prstGeom>
+              <a:solidFill>
+                <a:srgbClr val="2AA3A0">
+                  <a:alpha val="6000"/>
+                </a:srgbClr>
+              </a:solidFill>
+              <a:ln>
+                <a:noFill/>
+              </a:ln>
+            </p:spPr>
+            <p:txBody>
+              <a:bodyPr/>
+              <a:lstStyle/>
+              <a:p>
+                <a:endParaRPr lang="zh-CN" altLang="en-US"/>
+              </a:p>
+            </p:txBody>
+          </p:sp>
+          <p:sp>
+            <p:nvSpPr>
+              <p:cNvPr id="14" name="Rectangle 14"/>
+              <p:cNvSpPr/>
+              <p:nvPr/>
+            </p:nvSpPr>
+            <p:spPr>
+              <a:xfrm>
+                <a:off x="762000" y="3095625"/>
+                <a:ext cx="4953000" cy="523875"/>
+              </a:xfrm>
+              <a:prstGeom prst="roundRect">
+                <a:avLst>
+                  <a:gd name="adj" fmla="val 14545"/>
+                </a:avLst>
+              </a:prstGeom>
+              <a:solidFill>
+                <a:srgbClr val="8B6DB0">
+                  <a:alpha val="6000"/>
+                </a:srgbClr>
+              </a:solidFill>
+              <a:ln>
+                <a:noFill/>
+              </a:ln>
+            </p:spPr>
+            <p:txBody>
+              <a:bodyPr/>
+              <a:lstStyle/>
+              <a:p>
+                <a:endParaRPr lang="zh-CN" altLang="en-US" dirty="0"/>
+              </a:p>
+            </p:txBody>
+          </p:sp>
+          <p:sp>
+            <p:nvSpPr>
+              <p:cNvPr id="15" name="TextBox 15"/>
+              <p:cNvSpPr txBox="1"/>
+              <p:nvPr/>
+            </p:nvSpPr>
+            <p:spPr>
+              <a:xfrm>
+                <a:off x="935355" y="2629376"/>
+                <a:ext cx="3900107" cy="207749"/>
+              </a:xfrm>
+              <a:prstGeom prst="rect">
+                <a:avLst/>
+              </a:prstGeom>
+              <a:noFill/>
+              <a:ln>
+                <a:noFill/>
+              </a:ln>
+            </p:spPr>
+            <p:txBody>
+              <a:bodyPr wrap="none" lIns="0" tIns="0" rIns="0" bIns="0" anchor="t" anchorCtr="0">
+                <a:spAutoFit/>
+              </a:bodyPr>
+              <a:lstStyle/>
+              <a:p>
+                <a:pPr algn="l"/>
+                <a:r>
+                  <a:rPr lang="en-US" altLang="zh-CN" sz="1350" dirty="0">
+                    <a:solidFill>
+                      <a:srgbClr val="2D2A26"/>
+                    </a:solidFill>
+                    <a:latin typeface="Arial"/>
+                    <a:ea typeface="Microsoft YaHei"/>
+                    <a:cs typeface="Arial"/>
+                  </a:rPr>
+                  <a:t>2</a:t>
+                </a:r>
+                <a:r>
+                  <a:rPr lang="zh-CN" sz="1350" dirty="0">
+                    <a:solidFill>
+                      <a:srgbClr val="2D2A26"/>
+                    </a:solidFill>
+                    <a:latin typeface="Arial"/>
+                    <a:ea typeface="Microsoft YaHei"/>
+                    <a:cs typeface="Arial"/>
+                  </a:rPr>
+                  <a:t>. 覆盖数据处理、PCA、ML、可视化</a:t>
+                </a:r>
+                <a:r>
+                  <a:rPr lang="zh-CN" altLang="en-US" sz="1350" dirty="0">
+                    <a:solidFill>
+                      <a:srgbClr val="2D2A26"/>
+                    </a:solidFill>
+                    <a:latin typeface="Arial"/>
+                    <a:ea typeface="Microsoft YaHei"/>
+                    <a:cs typeface="Arial"/>
+                  </a:rPr>
+                  <a:t>与应用</a:t>
+                </a:r>
+                <a:r>
+                  <a:rPr lang="zh-CN" sz="1350" dirty="0">
+                    <a:solidFill>
+                      <a:srgbClr val="2D2A26"/>
+                    </a:solidFill>
+                    <a:latin typeface="Arial"/>
+                    <a:ea typeface="Microsoft YaHei"/>
+                    <a:cs typeface="Arial"/>
+                  </a:rPr>
+                  <a:t>全流程</a:t>
+                </a:r>
+              </a:p>
+            </p:txBody>
+          </p:sp>
+          <p:sp>
+            <p:nvSpPr>
+              <p:cNvPr id="16" name="Rectangle 16"/>
+              <p:cNvSpPr/>
+              <p:nvPr/>
+            </p:nvSpPr>
+            <p:spPr>
+              <a:xfrm>
+                <a:off x="762000" y="3714750"/>
+                <a:ext cx="4953000" cy="523875"/>
+              </a:xfrm>
+              <a:prstGeom prst="roundRect">
+                <a:avLst>
+                  <a:gd name="adj" fmla="val 14545"/>
+                </a:avLst>
+              </a:prstGeom>
+              <a:solidFill>
+                <a:srgbClr val="E8842A">
+                  <a:alpha val="6000"/>
+                </a:srgbClr>
+              </a:solidFill>
+              <a:ln>
+                <a:noFill/>
+              </a:ln>
+            </p:spPr>
+            <p:txBody>
+              <a:bodyPr/>
+              <a:lstStyle/>
+              <a:p>
+                <a:endParaRPr lang="zh-CN" altLang="en-US"/>
+              </a:p>
+            </p:txBody>
+          </p:sp>
+          <p:sp>
+            <p:nvSpPr>
+              <p:cNvPr id="17" name="TextBox 17"/>
+              <p:cNvSpPr txBox="1"/>
+              <p:nvPr/>
+            </p:nvSpPr>
+            <p:spPr>
+              <a:xfrm>
+                <a:off x="935355" y="3891563"/>
+                <a:ext cx="2986659" cy="274320"/>
+              </a:xfrm>
+              <a:prstGeom prst="rect">
+                <a:avLst/>
+              </a:prstGeom>
+              <a:noFill/>
+              <a:ln>
+                <a:noFill/>
+              </a:ln>
+            </p:spPr>
+            <p:txBody>
+              <a:bodyPr wrap="none" lIns="0" tIns="0" rIns="0" bIns="0" anchor="t" anchorCtr="0">
+                <a:spAutoFit/>
+              </a:bodyPr>
+              <a:lstStyle/>
+              <a:p>
+                <a:pPr algn="l"/>
+                <a:r>
+                  <a:rPr lang="zh-CN" sz="1350" dirty="0">
+                    <a:solidFill>
+                      <a:srgbClr val="2D2A26"/>
+                    </a:solidFill>
+                    <a:latin typeface="Arial"/>
+                    <a:ea typeface="Microsoft YaHei"/>
+                    <a:cs typeface="Arial"/>
+                  </a:rPr>
+                  <a:t>4. 多模型统一比较，按结果选择模型</a:t>
+                </a:r>
+              </a:p>
+            </p:txBody>
+          </p:sp>
+          <p:sp>
+            <p:nvSpPr>
+              <p:cNvPr id="18" name="Rectangle 18"/>
+              <p:cNvSpPr/>
+              <p:nvPr/>
+            </p:nvSpPr>
+            <p:spPr>
+              <a:xfrm>
+                <a:off x="762000" y="4333875"/>
+                <a:ext cx="4953000" cy="523875"/>
+              </a:xfrm>
+              <a:prstGeom prst="roundRect">
+                <a:avLst>
+                  <a:gd name="adj" fmla="val 14545"/>
+                </a:avLst>
+              </a:prstGeom>
+              <a:solidFill>
+                <a:srgbClr val="D4940A">
+                  <a:alpha val="6000"/>
+                </a:srgbClr>
+              </a:solidFill>
+              <a:ln>
+                <a:noFill/>
+              </a:ln>
+            </p:spPr>
+            <p:txBody>
+              <a:bodyPr/>
+              <a:lstStyle/>
+              <a:p>
+                <a:endParaRPr lang="zh-CN" altLang="en-US"/>
+              </a:p>
+            </p:txBody>
+          </p:sp>
+          <p:sp>
+            <p:nvSpPr>
+              <p:cNvPr id="19" name="TextBox 19"/>
+              <p:cNvSpPr txBox="1"/>
+              <p:nvPr/>
+            </p:nvSpPr>
+            <p:spPr>
+              <a:xfrm>
+                <a:off x="935355" y="4468178"/>
+                <a:ext cx="3346704" cy="274320"/>
+              </a:xfrm>
+              <a:prstGeom prst="rect">
+                <a:avLst/>
+              </a:prstGeom>
+              <a:noFill/>
+              <a:ln>
+                <a:noFill/>
+              </a:ln>
+            </p:spPr>
+            <p:txBody>
+              <a:bodyPr wrap="none" lIns="0" tIns="0" rIns="0" bIns="0" anchor="t" anchorCtr="0">
+                <a:spAutoFit/>
+              </a:bodyPr>
+              <a:lstStyle/>
+              <a:p>
+                <a:pPr algn="l"/>
+                <a:r>
+                  <a:rPr lang="zh-CN" sz="1350" dirty="0">
+                    <a:solidFill>
+                      <a:srgbClr val="2D2A26"/>
+                    </a:solidFill>
+                    <a:latin typeface="Arial"/>
+                    <a:ea typeface="Microsoft YaHei"/>
+                    <a:cs typeface="Arial"/>
+                  </a:rPr>
+                  <a:t>5. 预测光谱用于照明补偿，形成应用闭环</a:t>
+                </a:r>
+              </a:p>
+            </p:txBody>
+          </p:sp>
+        </p:grpSp>
+        <p:sp>
+          <p:nvSpPr>
+            <p:cNvPr id="45" name="TextBox 15">
+              <a:extLst>
+                <a:ext uri="{FF2B5EF4-FFF2-40B4-BE49-F238E27FC236}">
+                  <a16:creationId xmlns:a16="http://schemas.microsoft.com/office/drawing/2014/main" id="{0A81B17F-609B-12F7-B8EC-EB4EF36D6134}"/>
+                </a:ext>
+              </a:extLst>
+            </p:cNvPr>
+            <p:cNvSpPr txBox="1"/>
+            <p:nvPr/>
+          </p:nvSpPr>
+          <p:spPr>
+            <a:xfrm>
+              <a:off x="935354" y="3255904"/>
+              <a:ext cx="3837589" cy="207749"/>
+            </a:xfrm>
+            <a:prstGeom prst="rect">
+              <a:avLst/>
+            </a:prstGeom>
+            <a:noFill/>
+            <a:ln>
+              <a:noFill/>
+            </a:ln>
+          </p:spPr>
+          <p:txBody>
+            <a:bodyPr wrap="none" lIns="0" tIns="0" rIns="0" bIns="0" anchor="t" anchorCtr="0">
+              <a:spAutoFit/>
+            </a:bodyPr>
+            <a:lstStyle/>
+            <a:p>
+              <a:pPr algn="l"/>
+              <a:r>
+                <a:rPr lang="en-US" altLang="zh-CN" sz="1350" dirty="0">
+                  <a:solidFill>
+                    <a:srgbClr val="2D2A26"/>
+                  </a:solidFill>
+                  <a:latin typeface="Arial"/>
+                  <a:ea typeface="Microsoft YaHei"/>
+                  <a:cs typeface="Arial"/>
+                </a:rPr>
+                <a:t>3</a:t>
+              </a:r>
+              <a:r>
+                <a:rPr lang="zh-CN" sz="1350" dirty="0">
+                  <a:solidFill>
+                    <a:srgbClr val="2D2A26"/>
+                  </a:solidFill>
+                  <a:latin typeface="Arial"/>
+                  <a:ea typeface="Microsoft YaHei"/>
+                  <a:cs typeface="Arial"/>
+                </a:rPr>
+                <a:t>. </a:t>
+              </a:r>
+              <a:r>
+                <a:rPr lang="zh-CN" altLang="en-US" sz="1350" dirty="0">
+                  <a:solidFill>
+                    <a:srgbClr val="2D2A26"/>
+                  </a:solidFill>
+                  <a:latin typeface="Arial"/>
+                  <a:ea typeface="Microsoft YaHei"/>
+                  <a:cs typeface="Arial"/>
+                </a:rPr>
+                <a:t>输入易获取，模型成分精简，效率高，效果出色</a:t>
+              </a:r>
+              <a:endParaRPr lang="zh-CN" sz="1350" dirty="0">
                 <a:solidFill>
                   <a:srgbClr val="2D2A26"/>
                 </a:solidFill>
                 <a:latin typeface="Arial"/>
                 <a:ea typeface="Microsoft YaHei"/>
                 <a:cs typeface="Arial"/>
-              </a:rPr>
-              <a:t>3</a:t>
-            </a:r>
-            <a:r>
-              <a:rPr lang="zh-CN" sz="1350" dirty="0">
-                <a:solidFill>
-                  <a:srgbClr val="2D2A26"/>
-                </a:solidFill>
-                <a:latin typeface="Arial"/>
-                <a:ea typeface="Microsoft YaHei"/>
-                <a:cs typeface="Arial"/>
-              </a:rPr>
-              <a:t>. </a:t>
-            </a:r>
-            <a:r>
-              <a:rPr lang="zh-CN" altLang="en-US" sz="1350" dirty="0">
-                <a:solidFill>
-                  <a:srgbClr val="2D2A26"/>
-                </a:solidFill>
-                <a:latin typeface="Arial"/>
-                <a:ea typeface="Microsoft YaHei"/>
-                <a:cs typeface="Arial"/>
-              </a:rPr>
-              <a:t>输入易获取，模型成分精简，效率高，成本低</a:t>
-            </a:r>
-            <a:endParaRPr lang="zh-CN" sz="1350" dirty="0">
-              <a:solidFill>
-                <a:srgbClr val="2D2A26"/>
-              </a:solidFill>
-              <a:latin typeface="Arial"/>
-              <a:ea typeface="Microsoft YaHei"/>
-              <a:cs typeface="Arial"/>
-            </a:endParaRPr>
-          </a:p>
-        </p:txBody>
-      </p:sp>
+              </a:endParaRPr>
+            </a:p>
+          </p:txBody>
+        </p:sp>
+      </p:grpSp>
     </p:spTree>
   </p:cSld>
   <p:clrMapOvr>
@@ -13752,7 +14369,7 @@
         <p:fade/>
       </p:transition>
     </mc:Choice>
-    <mc:Fallback xmlns:a16="http://schemas.microsoft.com/office/drawing/2014/main" xmlns="">
+    <mc:Fallback xmlns="" xmlns:a16="http://schemas.microsoft.com/office/drawing/2014/main">
       <p:transition>
         <p:fade/>
       </p:transition>
@@ -13782,7 +14399,7 @@
                             </p:stCondLst>
                             <p:childTnLst>
                               <p:par>
-                                <p:cTn id="5" presetID="22" presetClass="entr" presetSubtype="1" fill="hold" nodeType="afterEffect">
+                                <p:cTn id="5" presetID="2" presetClass="entr" presetSubtype="4" fill="hold" nodeType="afterEffect">
                                   <p:stCondLst>
                                     <p:cond delay="0"/>
                                   </p:stCondLst>
@@ -13790,50 +14407,6 @@
                                     <p:set>
                                       <p:cBhvr>
                                         <p:cTn id="6" dur="1" fill="hold">
-                                          <p:stCondLst>
-                                            <p:cond delay="0"/>
-                                          </p:stCondLst>
-                                        </p:cTn>
-                                        <p:tgtEl>
-                                          <p:spTgt spid="22"/>
-                                        </p:tgtEl>
-                                        <p:attrNameLst>
-                                          <p:attrName>style.visibility</p:attrName>
-                                        </p:attrNameLst>
-                                      </p:cBhvr>
-                                      <p:to>
-                                        <p:strVal val="visible"/>
-                                      </p:to>
-                                    </p:set>
-                                    <p:animEffect transition="in" filter="wipe(left)">
-                                      <p:cBhvr>
-                                        <p:cTn id="7" dur="400"/>
-                                        <p:tgtEl>
-                                          <p:spTgt spid="22"/>
-                                        </p:tgtEl>
-                                      </p:cBhvr>
-                                    </p:animEffect>
-                                  </p:childTnLst>
-                                </p:cTn>
-                              </p:par>
-                            </p:childTnLst>
-                          </p:cTn>
-                        </p:par>
-                        <p:par>
-                          <p:cTn id="8" fill="hold">
-                            <p:stCondLst>
-                              <p:cond delay="900"/>
-                            </p:stCondLst>
-                            <p:childTnLst>
-                              <p:par>
-                                <p:cTn id="9" presetID="2" presetClass="entr" presetSubtype="4" fill="hold" nodeType="afterEffect">
-                                  <p:stCondLst>
-                                    <p:cond delay="0"/>
-                                  </p:stCondLst>
-                                  <p:childTnLst>
-                                    <p:set>
-                                      <p:cBhvr>
-                                        <p:cTn id="10" dur="1" fill="hold">
                                           <p:stCondLst>
                                             <p:cond delay="0"/>
                                           </p:stCondLst>
@@ -13851,7 +14424,7 @@
                                     </p:set>
                                     <p:animEffect transition="in" filter="slide(fromBottom)">
                                       <p:cBhvr>
-                                        <p:cTn id="11" dur="400"/>
+                                        <p:cTn id="7" dur="400"/>
                                         <p:tgtEl>
                                           <p:spTgt spid="41"/>
                                         </p:tgtEl>
@@ -13888,8 +14461,8 @@
       </p:par>
     </p:tnLst>
     <p:bldLst>
+      <p:bldP spid="41" grpId="0"/>
       <p:bldP spid="22" grpId="0"/>
-      <p:bldP spid="41" grpId="0"/>
     </p:bldLst>
   </p:timing>
 </p:sld>
@@ -22183,7 +22756,7 @@
         <p:fade/>
       </p:transition>
     </mc:Choice>
-    <mc:Fallback xmlns:asvg="http://schemas.microsoft.com/office/drawing/2016/SVG/main" xmlns="">
+    <mc:Fallback xmlns="" xmlns:asvg="http://schemas.microsoft.com/office/drawing/2016/SVG/main">
       <p:transition>
         <p:fade/>
       </p:transition>
@@ -23120,7 +23693,7 @@
         <p:fade/>
       </p:transition>
     </mc:Choice>
-    <mc:Fallback xmlns:a16="http://schemas.microsoft.com/office/drawing/2014/main" xmlns="">
+    <mc:Fallback xmlns="" xmlns:a16="http://schemas.microsoft.com/office/drawing/2014/main">
       <p:transition>
         <p:fade/>
       </p:transition>
@@ -23824,7 +24397,7 @@
         <p:fade/>
       </p:transition>
     </mc:Choice>
-    <mc:Fallback xmlns:a16="http://schemas.microsoft.com/office/drawing/2014/main" xmlns="">
+    <mc:Fallback xmlns="" xmlns:a16="http://schemas.microsoft.com/office/drawing/2014/main">
       <p:transition>
         <p:fade/>
       </p:transition>
@@ -27848,7 +28421,7 @@
         <p:fade/>
       </p:transition>
     </mc:Choice>
-    <mc:Fallback xmlns:asvg="http://schemas.microsoft.com/office/drawing/2016/SVG/main" xmlns:a16="http://schemas.microsoft.com/office/drawing/2014/main" xmlns="">
+    <mc:Fallback xmlns="" xmlns:a16="http://schemas.microsoft.com/office/drawing/2014/main" xmlns:asvg="http://schemas.microsoft.com/office/drawing/2016/SVG/main">
       <p:transition>
         <p:fade/>
       </p:transition>
